--- a/slides/inicial.pptx
+++ b/slides/inicial.pptx
@@ -5,7 +5,7 @@
     <p:sldMasterId id="2147483738" r:id="rId1"/>
   </p:sldMasterIdLst>
   <p:notesMasterIdLst>
-    <p:notesMasterId r:id="rId19"/>
+    <p:notesMasterId r:id="rId20"/>
   </p:notesMasterIdLst>
   <p:sldIdLst>
     <p:sldId id="256" r:id="rId2"/>
@@ -24,7 +24,8 @@
     <p:sldId id="270" r:id="rId15"/>
     <p:sldId id="271" r:id="rId16"/>
     <p:sldId id="273" r:id="rId17"/>
-    <p:sldId id="272" r:id="rId18"/>
+    <p:sldId id="275" r:id="rId18"/>
+    <p:sldId id="272" r:id="rId19"/>
   </p:sldIdLst>
   <p:sldSz cx="12192000" cy="6858000"/>
   <p:notesSz cx="6858000" cy="9144000"/>
@@ -5785,6 +5786,788 @@
 </file>
 
 <file path=ppt/diagrams/colors7.xml><?xml version="1.0" encoding="utf-8"?>
+<dgm:colorsDef xmlns:dgm="http://schemas.openxmlformats.org/drawingml/2006/diagram" xmlns:a="http://schemas.openxmlformats.org/drawingml/2006/main" uniqueId="urn:microsoft.com/office/officeart/2005/8/colors/colorful2">
+  <dgm:title val=""/>
+  <dgm:desc val=""/>
+  <dgm:catLst>
+    <dgm:cat type="colorful" pri="10200"/>
+  </dgm:catLst>
+  <dgm:styleLbl name="node0">
+    <dgm:fillClrLst meth="repeat">
+      <a:schemeClr val="accent1"/>
+    </dgm:fillClrLst>
+    <dgm:linClrLst meth="repeat">
+      <a:schemeClr val="lt1"/>
+    </dgm:linClrLst>
+    <dgm:effectClrLst/>
+    <dgm:txLinClrLst/>
+    <dgm:txFillClrLst/>
+    <dgm:txEffectClrLst/>
+  </dgm:styleLbl>
+  <dgm:styleLbl name="node1">
+    <dgm:fillClrLst>
+      <a:schemeClr val="accent2"/>
+      <a:schemeClr val="accent3"/>
+    </dgm:fillClrLst>
+    <dgm:linClrLst meth="repeat">
+      <a:schemeClr val="lt1"/>
+    </dgm:linClrLst>
+    <dgm:effectClrLst/>
+    <dgm:txLinClrLst/>
+    <dgm:txFillClrLst/>
+    <dgm:txEffectClrLst/>
+  </dgm:styleLbl>
+  <dgm:styleLbl name="alignNode1">
+    <dgm:fillClrLst>
+      <a:schemeClr val="accent2"/>
+      <a:schemeClr val="accent3"/>
+    </dgm:fillClrLst>
+    <dgm:linClrLst>
+      <a:schemeClr val="accent2"/>
+      <a:schemeClr val="accent3"/>
+    </dgm:linClrLst>
+    <dgm:effectClrLst/>
+    <dgm:txLinClrLst/>
+    <dgm:txFillClrLst/>
+    <dgm:txEffectClrLst/>
+  </dgm:styleLbl>
+  <dgm:styleLbl name="lnNode1">
+    <dgm:fillClrLst>
+      <a:schemeClr val="accent2"/>
+      <a:schemeClr val="accent3"/>
+    </dgm:fillClrLst>
+    <dgm:linClrLst meth="repeat">
+      <a:schemeClr val="lt1"/>
+    </dgm:linClrLst>
+    <dgm:effectClrLst/>
+    <dgm:txLinClrLst/>
+    <dgm:txFillClrLst/>
+    <dgm:txEffectClrLst/>
+  </dgm:styleLbl>
+  <dgm:styleLbl name="vennNode1">
+    <dgm:fillClrLst>
+      <a:schemeClr val="accent2">
+        <a:alpha val="50000"/>
+      </a:schemeClr>
+      <a:schemeClr val="accent3">
+        <a:alpha val="50000"/>
+      </a:schemeClr>
+    </dgm:fillClrLst>
+    <dgm:linClrLst meth="repeat">
+      <a:schemeClr val="lt1"/>
+    </dgm:linClrLst>
+    <dgm:effectClrLst/>
+    <dgm:txLinClrLst/>
+    <dgm:txFillClrLst/>
+    <dgm:txEffectClrLst/>
+  </dgm:styleLbl>
+  <dgm:styleLbl name="node2">
+    <dgm:fillClrLst>
+      <a:schemeClr val="accent3"/>
+    </dgm:fillClrLst>
+    <dgm:linClrLst meth="repeat">
+      <a:schemeClr val="lt1"/>
+    </dgm:linClrLst>
+    <dgm:effectClrLst/>
+    <dgm:txLinClrLst/>
+    <dgm:txFillClrLst/>
+    <dgm:txEffectClrLst/>
+  </dgm:styleLbl>
+  <dgm:styleLbl name="node3">
+    <dgm:fillClrLst>
+      <a:schemeClr val="accent4"/>
+    </dgm:fillClrLst>
+    <dgm:linClrLst meth="repeat">
+      <a:schemeClr val="lt1"/>
+    </dgm:linClrLst>
+    <dgm:effectClrLst/>
+    <dgm:txLinClrLst/>
+    <dgm:txFillClrLst/>
+    <dgm:txEffectClrLst/>
+  </dgm:styleLbl>
+  <dgm:styleLbl name="node4">
+    <dgm:fillClrLst>
+      <a:schemeClr val="accent5"/>
+    </dgm:fillClrLst>
+    <dgm:linClrLst meth="repeat">
+      <a:schemeClr val="lt1"/>
+    </dgm:linClrLst>
+    <dgm:effectClrLst/>
+    <dgm:txLinClrLst/>
+    <dgm:txFillClrLst/>
+    <dgm:txEffectClrLst/>
+  </dgm:styleLbl>
+  <dgm:styleLbl name="fgImgPlace1">
+    <dgm:fillClrLst>
+      <a:schemeClr val="accent2">
+        <a:tint val="50000"/>
+      </a:schemeClr>
+      <a:schemeClr val="accent3">
+        <a:tint val="50000"/>
+      </a:schemeClr>
+    </dgm:fillClrLst>
+    <dgm:linClrLst meth="repeat">
+      <a:schemeClr val="lt1"/>
+    </dgm:linClrLst>
+    <dgm:effectClrLst/>
+    <dgm:txLinClrLst/>
+    <dgm:txFillClrLst meth="repeat">
+      <a:schemeClr val="lt1"/>
+    </dgm:txFillClrLst>
+    <dgm:txEffectClrLst/>
+  </dgm:styleLbl>
+  <dgm:styleLbl name="alignImgPlace1">
+    <dgm:fillClrLst>
+      <a:schemeClr val="accent2">
+        <a:tint val="50000"/>
+      </a:schemeClr>
+      <a:schemeClr val="accent3">
+        <a:tint val="20000"/>
+      </a:schemeClr>
+    </dgm:fillClrLst>
+    <dgm:linClrLst meth="repeat">
+      <a:schemeClr val="lt1"/>
+    </dgm:linClrLst>
+    <dgm:effectClrLst/>
+    <dgm:txLinClrLst/>
+    <dgm:txFillClrLst meth="repeat">
+      <a:schemeClr val="lt1"/>
+    </dgm:txFillClrLst>
+    <dgm:txEffectClrLst/>
+  </dgm:styleLbl>
+  <dgm:styleLbl name="bgImgPlace1">
+    <dgm:fillClrLst>
+      <a:schemeClr val="accent2">
+        <a:tint val="50000"/>
+      </a:schemeClr>
+      <a:schemeClr val="accent3">
+        <a:tint val="20000"/>
+      </a:schemeClr>
+    </dgm:fillClrLst>
+    <dgm:linClrLst meth="repeat">
+      <a:schemeClr val="lt1"/>
+    </dgm:linClrLst>
+    <dgm:effectClrLst/>
+    <dgm:txLinClrLst/>
+    <dgm:txFillClrLst meth="repeat">
+      <a:schemeClr val="lt1"/>
+    </dgm:txFillClrLst>
+    <dgm:txEffectClrLst/>
+  </dgm:styleLbl>
+  <dgm:styleLbl name="sibTrans2D1">
+    <dgm:fillClrLst>
+      <a:schemeClr val="accent2"/>
+      <a:schemeClr val="accent3"/>
+    </dgm:fillClrLst>
+    <dgm:linClrLst meth="repeat">
+      <a:schemeClr val="lt1"/>
+    </dgm:linClrLst>
+    <dgm:effectClrLst/>
+    <dgm:txLinClrLst/>
+    <dgm:txFillClrLst/>
+    <dgm:txEffectClrLst/>
+  </dgm:styleLbl>
+  <dgm:styleLbl name="fgSibTrans2D1">
+    <dgm:fillClrLst>
+      <a:schemeClr val="accent2"/>
+      <a:schemeClr val="accent3"/>
+    </dgm:fillClrLst>
+    <dgm:linClrLst meth="repeat">
+      <a:schemeClr val="lt1"/>
+    </dgm:linClrLst>
+    <dgm:effectClrLst/>
+    <dgm:txLinClrLst/>
+    <dgm:txFillClrLst meth="repeat">
+      <a:schemeClr val="lt1"/>
+    </dgm:txFillClrLst>
+    <dgm:txEffectClrLst/>
+  </dgm:styleLbl>
+  <dgm:styleLbl name="bgSibTrans2D1">
+    <dgm:fillClrLst>
+      <a:schemeClr val="accent2"/>
+      <a:schemeClr val="accent3"/>
+    </dgm:fillClrLst>
+    <dgm:linClrLst meth="repeat">
+      <a:schemeClr val="lt1"/>
+    </dgm:linClrLst>
+    <dgm:effectClrLst/>
+    <dgm:txLinClrLst/>
+    <dgm:txFillClrLst meth="repeat">
+      <a:schemeClr val="lt1"/>
+    </dgm:txFillClrLst>
+    <dgm:txEffectClrLst/>
+  </dgm:styleLbl>
+  <dgm:styleLbl name="sibTrans1D1">
+    <dgm:fillClrLst/>
+    <dgm:linClrLst>
+      <a:schemeClr val="accent2"/>
+      <a:schemeClr val="accent3"/>
+    </dgm:linClrLst>
+    <dgm:effectClrLst/>
+    <dgm:txLinClrLst/>
+    <dgm:txFillClrLst meth="repeat">
+      <a:schemeClr val="tx1"/>
+    </dgm:txFillClrLst>
+    <dgm:txEffectClrLst/>
+  </dgm:styleLbl>
+  <dgm:styleLbl name="callout">
+    <dgm:fillClrLst meth="repeat">
+      <a:schemeClr val="accent2"/>
+    </dgm:fillClrLst>
+    <dgm:linClrLst meth="repeat">
+      <a:schemeClr val="accent2">
+        <a:tint val="50000"/>
+      </a:schemeClr>
+    </dgm:linClrLst>
+    <dgm:effectClrLst/>
+    <dgm:txLinClrLst/>
+    <dgm:txFillClrLst meth="repeat">
+      <a:schemeClr val="tx1"/>
+    </dgm:txFillClrLst>
+    <dgm:txEffectClrLst/>
+  </dgm:styleLbl>
+  <dgm:styleLbl name="asst0">
+    <dgm:fillClrLst meth="repeat">
+      <a:schemeClr val="accent2"/>
+    </dgm:fillClrLst>
+    <dgm:linClrLst meth="repeat">
+      <a:schemeClr val="lt1">
+        <a:shade val="80000"/>
+      </a:schemeClr>
+    </dgm:linClrLst>
+    <dgm:effectClrLst/>
+    <dgm:txLinClrLst/>
+    <dgm:txFillClrLst/>
+    <dgm:txEffectClrLst/>
+  </dgm:styleLbl>
+  <dgm:styleLbl name="asst1">
+    <dgm:fillClrLst meth="repeat">
+      <a:schemeClr val="accent3"/>
+    </dgm:fillClrLst>
+    <dgm:linClrLst meth="repeat">
+      <a:schemeClr val="lt1">
+        <a:shade val="80000"/>
+      </a:schemeClr>
+    </dgm:linClrLst>
+    <dgm:effectClrLst/>
+    <dgm:txLinClrLst/>
+    <dgm:txFillClrLst/>
+    <dgm:txEffectClrLst/>
+  </dgm:styleLbl>
+  <dgm:styleLbl name="asst2">
+    <dgm:fillClrLst>
+      <a:schemeClr val="accent4"/>
+    </dgm:fillClrLst>
+    <dgm:linClrLst meth="repeat">
+      <a:schemeClr val="lt1"/>
+    </dgm:linClrLst>
+    <dgm:effectClrLst/>
+    <dgm:txLinClrLst/>
+    <dgm:txFillClrLst/>
+    <dgm:txEffectClrLst/>
+  </dgm:styleLbl>
+  <dgm:styleLbl name="asst3">
+    <dgm:fillClrLst>
+      <a:schemeClr val="accent5"/>
+    </dgm:fillClrLst>
+    <dgm:linClrLst meth="repeat">
+      <a:schemeClr val="lt1"/>
+    </dgm:linClrLst>
+    <dgm:effectClrLst/>
+    <dgm:txLinClrLst/>
+    <dgm:txFillClrLst/>
+    <dgm:txEffectClrLst/>
+  </dgm:styleLbl>
+  <dgm:styleLbl name="asst4">
+    <dgm:fillClrLst>
+      <a:schemeClr val="accent6"/>
+    </dgm:fillClrLst>
+    <dgm:linClrLst meth="repeat">
+      <a:schemeClr val="lt1"/>
+    </dgm:linClrLst>
+    <dgm:effectClrLst/>
+    <dgm:txLinClrLst/>
+    <dgm:txFillClrLst/>
+    <dgm:txEffectClrLst/>
+  </dgm:styleLbl>
+  <dgm:styleLbl name="parChTrans2D1">
+    <dgm:fillClrLst meth="repeat">
+      <a:schemeClr val="accent2"/>
+    </dgm:fillClrLst>
+    <dgm:linClrLst meth="repeat">
+      <a:schemeClr val="lt1"/>
+    </dgm:linClrLst>
+    <dgm:effectClrLst/>
+    <dgm:txLinClrLst/>
+    <dgm:txFillClrLst meth="repeat">
+      <a:schemeClr val="lt1"/>
+    </dgm:txFillClrLst>
+    <dgm:txEffectClrLst/>
+  </dgm:styleLbl>
+  <dgm:styleLbl name="parChTrans2D2">
+    <dgm:fillClrLst meth="repeat">
+      <a:schemeClr val="accent3"/>
+    </dgm:fillClrLst>
+    <dgm:linClrLst meth="repeat">
+      <a:schemeClr val="lt1"/>
+    </dgm:linClrLst>
+    <dgm:effectClrLst/>
+    <dgm:txLinClrLst/>
+    <dgm:txFillClrLst/>
+    <dgm:txEffectClrLst/>
+  </dgm:styleLbl>
+  <dgm:styleLbl name="parChTrans2D3">
+    <dgm:fillClrLst meth="repeat">
+      <a:schemeClr val="accent4"/>
+    </dgm:fillClrLst>
+    <dgm:linClrLst meth="repeat">
+      <a:schemeClr val="lt1"/>
+    </dgm:linClrLst>
+    <dgm:effectClrLst/>
+    <dgm:txLinClrLst/>
+    <dgm:txFillClrLst/>
+    <dgm:txEffectClrLst/>
+  </dgm:styleLbl>
+  <dgm:styleLbl name="parChTrans2D4">
+    <dgm:fillClrLst meth="repeat">
+      <a:schemeClr val="accent5"/>
+    </dgm:fillClrLst>
+    <dgm:linClrLst meth="repeat">
+      <a:schemeClr val="lt1"/>
+    </dgm:linClrLst>
+    <dgm:effectClrLst/>
+    <dgm:txLinClrLst/>
+    <dgm:txFillClrLst meth="repeat">
+      <a:schemeClr val="lt1"/>
+    </dgm:txFillClrLst>
+    <dgm:txEffectClrLst/>
+  </dgm:styleLbl>
+  <dgm:styleLbl name="parChTrans1D1">
+    <dgm:fillClrLst meth="repeat">
+      <a:schemeClr val="accent2"/>
+    </dgm:fillClrLst>
+    <dgm:linClrLst meth="repeat">
+      <a:schemeClr val="accent2"/>
+    </dgm:linClrLst>
+    <dgm:effectClrLst/>
+    <dgm:txLinClrLst/>
+    <dgm:txFillClrLst meth="repeat">
+      <a:schemeClr val="tx1"/>
+    </dgm:txFillClrLst>
+    <dgm:txEffectClrLst/>
+  </dgm:styleLbl>
+  <dgm:styleLbl name="parChTrans1D2">
+    <dgm:fillClrLst meth="repeat">
+      <a:schemeClr val="accent2">
+        <a:tint val="90000"/>
+      </a:schemeClr>
+    </dgm:fillClrLst>
+    <dgm:linClrLst meth="repeat">
+      <a:schemeClr val="accent3"/>
+    </dgm:linClrLst>
+    <dgm:effectClrLst/>
+    <dgm:txLinClrLst/>
+    <dgm:txFillClrLst meth="repeat">
+      <a:schemeClr val="tx1"/>
+    </dgm:txFillClrLst>
+    <dgm:txEffectClrLst/>
+  </dgm:styleLbl>
+  <dgm:styleLbl name="parChTrans1D3">
+    <dgm:fillClrLst meth="repeat">
+      <a:schemeClr val="accent2">
+        <a:tint val="70000"/>
+      </a:schemeClr>
+    </dgm:fillClrLst>
+    <dgm:linClrLst meth="repeat">
+      <a:schemeClr val="accent4"/>
+    </dgm:linClrLst>
+    <dgm:effectClrLst/>
+    <dgm:txLinClrLst/>
+    <dgm:txFillClrLst meth="repeat">
+      <a:schemeClr val="tx1"/>
+    </dgm:txFillClrLst>
+    <dgm:txEffectClrLst/>
+  </dgm:styleLbl>
+  <dgm:styleLbl name="parChTrans1D4">
+    <dgm:fillClrLst meth="repeat">
+      <a:schemeClr val="accent2">
+        <a:tint val="50000"/>
+      </a:schemeClr>
+    </dgm:fillClrLst>
+    <dgm:linClrLst meth="repeat">
+      <a:schemeClr val="accent5"/>
+    </dgm:linClrLst>
+    <dgm:effectClrLst/>
+    <dgm:txLinClrLst/>
+    <dgm:txFillClrLst meth="repeat">
+      <a:schemeClr val="tx1"/>
+    </dgm:txFillClrLst>
+    <dgm:txEffectClrLst/>
+  </dgm:styleLbl>
+  <dgm:styleLbl name="fgAcc1">
+    <dgm:fillClrLst meth="repeat">
+      <a:schemeClr val="lt1">
+        <a:alpha val="90000"/>
+      </a:schemeClr>
+    </dgm:fillClrLst>
+    <dgm:linClrLst>
+      <a:schemeClr val="accent2"/>
+      <a:schemeClr val="accent3"/>
+    </dgm:linClrLst>
+    <dgm:effectClrLst/>
+    <dgm:txLinClrLst/>
+    <dgm:txFillClrLst meth="repeat">
+      <a:schemeClr val="dk1"/>
+    </dgm:txFillClrLst>
+    <dgm:txEffectClrLst/>
+  </dgm:styleLbl>
+  <dgm:styleLbl name="conFgAcc1">
+    <dgm:fillClrLst meth="repeat">
+      <a:schemeClr val="lt1">
+        <a:alpha val="90000"/>
+      </a:schemeClr>
+    </dgm:fillClrLst>
+    <dgm:linClrLst>
+      <a:schemeClr val="accent2"/>
+      <a:schemeClr val="accent3"/>
+    </dgm:linClrLst>
+    <dgm:effectClrLst/>
+    <dgm:txLinClrLst/>
+    <dgm:txFillClrLst meth="repeat">
+      <a:schemeClr val="dk1"/>
+    </dgm:txFillClrLst>
+    <dgm:txEffectClrLst/>
+  </dgm:styleLbl>
+  <dgm:styleLbl name="alignAcc1">
+    <dgm:fillClrLst meth="repeat">
+      <a:schemeClr val="lt1">
+        <a:alpha val="90000"/>
+      </a:schemeClr>
+    </dgm:fillClrLst>
+    <dgm:linClrLst>
+      <a:schemeClr val="accent2"/>
+      <a:schemeClr val="accent3"/>
+    </dgm:linClrLst>
+    <dgm:effectClrLst/>
+    <dgm:txLinClrLst/>
+    <dgm:txFillClrLst meth="repeat">
+      <a:schemeClr val="dk1"/>
+    </dgm:txFillClrLst>
+    <dgm:txEffectClrLst/>
+  </dgm:styleLbl>
+  <dgm:styleLbl name="trAlignAcc1">
+    <dgm:fillClrLst meth="repeat">
+      <a:schemeClr val="lt1">
+        <a:alpha val="40000"/>
+      </a:schemeClr>
+    </dgm:fillClrLst>
+    <dgm:linClrLst meth="repeat">
+      <a:schemeClr val="accent2"/>
+    </dgm:linClrLst>
+    <dgm:effectClrLst/>
+    <dgm:txLinClrLst/>
+    <dgm:txFillClrLst meth="repeat">
+      <a:schemeClr val="dk1"/>
+    </dgm:txFillClrLst>
+    <dgm:txEffectClrLst/>
+  </dgm:styleLbl>
+  <dgm:styleLbl name="bgAcc1">
+    <dgm:fillClrLst meth="repeat">
+      <a:schemeClr val="lt1">
+        <a:alpha val="90000"/>
+      </a:schemeClr>
+    </dgm:fillClrLst>
+    <dgm:linClrLst>
+      <a:schemeClr val="accent2"/>
+      <a:schemeClr val="accent3"/>
+    </dgm:linClrLst>
+    <dgm:effectClrLst/>
+    <dgm:txLinClrLst/>
+    <dgm:txFillClrLst meth="repeat">
+      <a:schemeClr val="dk1"/>
+    </dgm:txFillClrLst>
+    <dgm:txEffectClrLst/>
+  </dgm:styleLbl>
+  <dgm:styleLbl name="solidFgAcc1">
+    <dgm:fillClrLst meth="repeat">
+      <a:schemeClr val="lt1"/>
+    </dgm:fillClrLst>
+    <dgm:linClrLst>
+      <a:schemeClr val="accent2"/>
+      <a:schemeClr val="accent3"/>
+    </dgm:linClrLst>
+    <dgm:effectClrLst/>
+    <dgm:txLinClrLst/>
+    <dgm:txFillClrLst meth="repeat">
+      <a:schemeClr val="dk1"/>
+    </dgm:txFillClrLst>
+    <dgm:txEffectClrLst/>
+  </dgm:styleLbl>
+  <dgm:styleLbl name="solidAlignAcc1">
+    <dgm:fillClrLst meth="repeat">
+      <a:schemeClr val="lt1"/>
+    </dgm:fillClrLst>
+    <dgm:linClrLst>
+      <a:schemeClr val="accent2"/>
+      <a:schemeClr val="accent3"/>
+    </dgm:linClrLst>
+    <dgm:effectClrLst/>
+    <dgm:txLinClrLst/>
+    <dgm:txFillClrLst meth="repeat">
+      <a:schemeClr val="dk1"/>
+    </dgm:txFillClrLst>
+    <dgm:txEffectClrLst/>
+  </dgm:styleLbl>
+  <dgm:styleLbl name="solidBgAcc1">
+    <dgm:fillClrLst meth="repeat">
+      <a:schemeClr val="lt1"/>
+    </dgm:fillClrLst>
+    <dgm:linClrLst>
+      <a:schemeClr val="accent2"/>
+      <a:schemeClr val="accent3"/>
+    </dgm:linClrLst>
+    <dgm:effectClrLst/>
+    <dgm:txLinClrLst/>
+    <dgm:txFillClrLst meth="repeat">
+      <a:schemeClr val="dk1"/>
+    </dgm:txFillClrLst>
+    <dgm:txEffectClrLst/>
+  </dgm:styleLbl>
+  <dgm:styleLbl name="fgAccFollowNode1">
+    <dgm:fillClrLst>
+      <a:schemeClr val="accent2">
+        <a:tint val="40000"/>
+        <a:alpha val="90000"/>
+      </a:schemeClr>
+      <a:schemeClr val="accent3">
+        <a:tint val="40000"/>
+        <a:alpha val="90000"/>
+      </a:schemeClr>
+    </dgm:fillClrLst>
+    <dgm:linClrLst>
+      <a:schemeClr val="accent2">
+        <a:tint val="40000"/>
+        <a:alpha val="90000"/>
+      </a:schemeClr>
+      <a:schemeClr val="accent3">
+        <a:tint val="40000"/>
+        <a:alpha val="90000"/>
+      </a:schemeClr>
+    </dgm:linClrLst>
+    <dgm:effectClrLst/>
+    <dgm:txLinClrLst/>
+    <dgm:txFillClrLst meth="repeat">
+      <a:schemeClr val="dk1"/>
+    </dgm:txFillClrLst>
+    <dgm:txEffectClrLst/>
+  </dgm:styleLbl>
+  <dgm:styleLbl name="alignAccFollowNode1">
+    <dgm:fillClrLst>
+      <a:schemeClr val="accent2">
+        <a:tint val="40000"/>
+        <a:alpha val="90000"/>
+      </a:schemeClr>
+      <a:schemeClr val="accent3">
+        <a:tint val="40000"/>
+        <a:alpha val="90000"/>
+      </a:schemeClr>
+    </dgm:fillClrLst>
+    <dgm:linClrLst>
+      <a:schemeClr val="accent2">
+        <a:tint val="40000"/>
+        <a:alpha val="90000"/>
+      </a:schemeClr>
+      <a:schemeClr val="accent3">
+        <a:tint val="40000"/>
+        <a:alpha val="90000"/>
+      </a:schemeClr>
+    </dgm:linClrLst>
+    <dgm:effectClrLst/>
+    <dgm:txLinClrLst/>
+    <dgm:txFillClrLst meth="repeat">
+      <a:schemeClr val="dk1"/>
+    </dgm:txFillClrLst>
+    <dgm:txEffectClrLst/>
+  </dgm:styleLbl>
+  <dgm:styleLbl name="bgAccFollowNode1">
+    <dgm:fillClrLst>
+      <a:schemeClr val="accent2">
+        <a:tint val="40000"/>
+        <a:alpha val="90000"/>
+      </a:schemeClr>
+      <a:schemeClr val="accent3">
+        <a:tint val="40000"/>
+        <a:alpha val="90000"/>
+      </a:schemeClr>
+    </dgm:fillClrLst>
+    <dgm:linClrLst>
+      <a:schemeClr val="accent2">
+        <a:tint val="40000"/>
+        <a:alpha val="90000"/>
+      </a:schemeClr>
+      <a:schemeClr val="accent3">
+        <a:tint val="40000"/>
+        <a:alpha val="90000"/>
+      </a:schemeClr>
+    </dgm:linClrLst>
+    <dgm:effectClrLst/>
+    <dgm:txLinClrLst/>
+    <dgm:txFillClrLst meth="repeat">
+      <a:schemeClr val="dk1"/>
+    </dgm:txFillClrLst>
+    <dgm:txEffectClrLst/>
+  </dgm:styleLbl>
+  <dgm:styleLbl name="fgAcc0">
+    <dgm:fillClrLst meth="repeat">
+      <a:schemeClr val="lt1">
+        <a:alpha val="90000"/>
+      </a:schemeClr>
+    </dgm:fillClrLst>
+    <dgm:linClrLst>
+      <a:schemeClr val="accent1"/>
+    </dgm:linClrLst>
+    <dgm:effectClrLst/>
+    <dgm:txLinClrLst/>
+    <dgm:txFillClrLst meth="repeat">
+      <a:schemeClr val="dk1"/>
+    </dgm:txFillClrLst>
+    <dgm:txEffectClrLst/>
+  </dgm:styleLbl>
+  <dgm:styleLbl name="fgAcc2">
+    <dgm:fillClrLst meth="repeat">
+      <a:schemeClr val="lt1">
+        <a:alpha val="90000"/>
+      </a:schemeClr>
+    </dgm:fillClrLst>
+    <dgm:linClrLst>
+      <a:schemeClr val="accent3"/>
+    </dgm:linClrLst>
+    <dgm:effectClrLst/>
+    <dgm:txLinClrLst/>
+    <dgm:txFillClrLst meth="repeat">
+      <a:schemeClr val="dk1"/>
+    </dgm:txFillClrLst>
+    <dgm:txEffectClrLst/>
+  </dgm:styleLbl>
+  <dgm:styleLbl name="fgAcc3">
+    <dgm:fillClrLst meth="repeat">
+      <a:schemeClr val="lt1">
+        <a:alpha val="90000"/>
+      </a:schemeClr>
+    </dgm:fillClrLst>
+    <dgm:linClrLst>
+      <a:schemeClr val="accent4"/>
+    </dgm:linClrLst>
+    <dgm:effectClrLst/>
+    <dgm:txLinClrLst/>
+    <dgm:txFillClrLst meth="repeat">
+      <a:schemeClr val="dk1"/>
+    </dgm:txFillClrLst>
+    <dgm:txEffectClrLst/>
+  </dgm:styleLbl>
+  <dgm:styleLbl name="fgAcc4">
+    <dgm:fillClrLst meth="repeat">
+      <a:schemeClr val="lt1">
+        <a:alpha val="90000"/>
+      </a:schemeClr>
+    </dgm:fillClrLst>
+    <dgm:linClrLst>
+      <a:schemeClr val="accent5"/>
+    </dgm:linClrLst>
+    <dgm:effectClrLst/>
+    <dgm:txLinClrLst/>
+    <dgm:txFillClrLst meth="repeat">
+      <a:schemeClr val="dk1"/>
+    </dgm:txFillClrLst>
+    <dgm:txEffectClrLst/>
+  </dgm:styleLbl>
+  <dgm:styleLbl name="bgShp">
+    <dgm:fillClrLst meth="repeat">
+      <a:schemeClr val="accent2">
+        <a:tint val="40000"/>
+      </a:schemeClr>
+    </dgm:fillClrLst>
+    <dgm:linClrLst meth="repeat">
+      <a:schemeClr val="dk1"/>
+    </dgm:linClrLst>
+    <dgm:effectClrLst/>
+    <dgm:txLinClrLst/>
+    <dgm:txFillClrLst meth="repeat">
+      <a:schemeClr val="dk1"/>
+    </dgm:txFillClrLst>
+    <dgm:txEffectClrLst/>
+  </dgm:styleLbl>
+  <dgm:styleLbl name="dkBgShp">
+    <dgm:fillClrLst meth="repeat">
+      <a:schemeClr val="accent2">
+        <a:shade val="90000"/>
+      </a:schemeClr>
+    </dgm:fillClrLst>
+    <dgm:linClrLst meth="repeat">
+      <a:schemeClr val="dk1"/>
+    </dgm:linClrLst>
+    <dgm:effectClrLst/>
+    <dgm:txLinClrLst/>
+    <dgm:txFillClrLst meth="repeat">
+      <a:schemeClr val="lt1"/>
+    </dgm:txFillClrLst>
+    <dgm:txEffectClrLst/>
+  </dgm:styleLbl>
+  <dgm:styleLbl name="trBgShp">
+    <dgm:fillClrLst meth="repeat">
+      <a:schemeClr val="accent2">
+        <a:tint val="50000"/>
+        <a:alpha val="40000"/>
+      </a:schemeClr>
+    </dgm:fillClrLst>
+    <dgm:linClrLst meth="repeat">
+      <a:schemeClr val="accent2"/>
+    </dgm:linClrLst>
+    <dgm:effectClrLst/>
+    <dgm:txLinClrLst/>
+    <dgm:txFillClrLst meth="repeat">
+      <a:schemeClr val="lt1"/>
+    </dgm:txFillClrLst>
+    <dgm:txEffectClrLst/>
+  </dgm:styleLbl>
+  <dgm:styleLbl name="fgShp">
+    <dgm:fillClrLst meth="repeat">
+      <a:schemeClr val="accent2">
+        <a:tint val="40000"/>
+      </a:schemeClr>
+    </dgm:fillClrLst>
+    <dgm:linClrLst meth="repeat">
+      <a:schemeClr val="lt1"/>
+    </dgm:linClrLst>
+    <dgm:effectClrLst/>
+    <dgm:txLinClrLst/>
+    <dgm:txFillClrLst meth="repeat">
+      <a:schemeClr val="dk1"/>
+    </dgm:txFillClrLst>
+    <dgm:txEffectClrLst/>
+  </dgm:styleLbl>
+  <dgm:styleLbl name="revTx">
+    <dgm:fillClrLst meth="repeat">
+      <a:schemeClr val="lt1">
+        <a:alpha val="0"/>
+      </a:schemeClr>
+    </dgm:fillClrLst>
+    <dgm:linClrLst meth="repeat">
+      <a:schemeClr val="dk1">
+        <a:alpha val="0"/>
+      </a:schemeClr>
+    </dgm:linClrLst>
+    <dgm:effectClrLst/>
+    <dgm:txLinClrLst/>
+    <dgm:txFillClrLst meth="repeat">
+      <a:schemeClr val="tx1"/>
+    </dgm:txFillClrLst>
+    <dgm:txEffectClrLst/>
+  </dgm:styleLbl>
+</dgm:colorsDef>
+</file>
+
+<file path=ppt/diagrams/colors8.xml><?xml version="1.0" encoding="utf-8"?>
 <dgm:colorsDef xmlns:dgm="http://schemas.openxmlformats.org/drawingml/2006/diagram" xmlns:a="http://schemas.openxmlformats.org/drawingml/2006/main" uniqueId="urn:microsoft.com/office/officeart/2018/5/colors/Iconchunking_neutralicontext_colorful1">
   <dgm:title val=""/>
   <dgm:desc val=""/>
@@ -6847,13 +7630,13 @@
       <dgm:prSet presAssocID="{7ECCF6E3-29AE-45DC-A9EC-D20EBDE7E98A}" presName="iconRect" presStyleLbl="node1" presStyleIdx="0" presStyleCnt="3"/>
       <dgm:spPr>
         <a:blipFill>
-          <a:blip xmlns:r="http://schemas.openxmlformats.org/officeDocument/2006/relationships" r:embed="rId1">
+          <a:blip xmlns:r="http://schemas.openxmlformats.org/officeDocument/2006/relationships">
             <a:extLst>
               <a:ext uri="{28A0092B-C50C-407E-A947-70E740481C1C}">
                 <a14:useLocalDpi xmlns:a14="http://schemas.microsoft.com/office/drawing/2010/main" val="0"/>
               </a:ext>
               <a:ext uri="{96DAC541-7B7A-43D3-8B79-37D633B846F1}">
-                <asvg:svgBlip xmlns:asvg="http://schemas.microsoft.com/office/drawing/2016/SVG/main" r:embed="rId2"/>
+                <asvg:svgBlip xmlns:asvg="http://schemas.microsoft.com/office/drawing/2016/SVG/main" r:embed="rId1"/>
               </a:ext>
             </a:extLst>
           </a:blip>
@@ -6896,13 +7679,13 @@
       <dgm:prSet presAssocID="{4BDC7770-CA1A-40D7-9FCB-8567AA4552EE}" presName="iconRect" presStyleLbl="node1" presStyleIdx="1" presStyleCnt="3"/>
       <dgm:spPr>
         <a:blipFill>
-          <a:blip xmlns:r="http://schemas.openxmlformats.org/officeDocument/2006/relationships" r:embed="rId3">
+          <a:blip xmlns:r="http://schemas.openxmlformats.org/officeDocument/2006/relationships">
             <a:extLst>
               <a:ext uri="{28A0092B-C50C-407E-A947-70E740481C1C}">
                 <a14:useLocalDpi xmlns:a14="http://schemas.microsoft.com/office/drawing/2010/main" val="0"/>
               </a:ext>
               <a:ext uri="{96DAC541-7B7A-43D3-8B79-37D633B846F1}">
-                <asvg:svgBlip xmlns:asvg="http://schemas.microsoft.com/office/drawing/2016/SVG/main" r:embed="rId4"/>
+                <asvg:svgBlip xmlns:asvg="http://schemas.microsoft.com/office/drawing/2016/SVG/main" r:embed="rId2"/>
               </a:ext>
             </a:extLst>
           </a:blip>
@@ -6945,13 +7728,13 @@
       <dgm:prSet presAssocID="{CA4ECC02-F1FE-4CF2-A2F0-1865E3D362CE}" presName="iconRect" presStyleLbl="node1" presStyleIdx="2" presStyleCnt="3"/>
       <dgm:spPr>
         <a:blipFill>
-          <a:blip xmlns:r="http://schemas.openxmlformats.org/officeDocument/2006/relationships" r:embed="rId5">
+          <a:blip xmlns:r="http://schemas.openxmlformats.org/officeDocument/2006/relationships">
             <a:extLst>
               <a:ext uri="{28A0092B-C50C-407E-A947-70E740481C1C}">
                 <a14:useLocalDpi xmlns:a14="http://schemas.microsoft.com/office/drawing/2010/main" val="0"/>
               </a:ext>
               <a:ext uri="{96DAC541-7B7A-43D3-8B79-37D633B846F1}">
-                <asvg:svgBlip xmlns:asvg="http://schemas.microsoft.com/office/drawing/2016/SVG/main" r:embed="rId6"/>
+                <asvg:svgBlip xmlns:asvg="http://schemas.microsoft.com/office/drawing/2016/SVG/main" r:embed="rId3"/>
               </a:ext>
             </a:extLst>
           </a:blip>
@@ -9176,6 +9959,262 @@
 <file path=ppt/diagrams/data7.xml><?xml version="1.0" encoding="utf-8"?>
 <dgm:dataModel xmlns:dgm="http://schemas.openxmlformats.org/drawingml/2006/diagram" xmlns:a="http://schemas.openxmlformats.org/drawingml/2006/main">
   <dgm:ptLst>
+    <dgm:pt modelId="{0136F9B8-9D65-49F3-BF44-B2AFDC1BA388}" type="doc">
+      <dgm:prSet loTypeId="urn:microsoft.com/office/officeart/2005/8/layout/vList2" loCatId="list" qsTypeId="urn:microsoft.com/office/officeart/2005/8/quickstyle/simple1" qsCatId="simple" csTypeId="urn:microsoft.com/office/officeart/2005/8/colors/colorful2" csCatId="colorful" phldr="1"/>
+      <dgm:spPr/>
+      <dgm:t>
+        <a:bodyPr/>
+        <a:lstStyle/>
+        <a:p>
+          <a:endParaRPr lang="en-US"/>
+        </a:p>
+      </dgm:t>
+    </dgm:pt>
+    <dgm:pt modelId="{28C2F14F-4FA2-471F-B614-EAF7A05F564E}">
+      <dgm:prSet/>
+      <dgm:spPr/>
+      <dgm:t>
+        <a:bodyPr/>
+        <a:lstStyle/>
+        <a:p>
+          <a:r>
+            <a:rPr lang="es-MX" dirty="0"/>
+            <a:t>Uso de agentes para automatizar tareas de ingesta y preprocesamiento</a:t>
+          </a:r>
+          <a:endParaRPr lang="en-US" dirty="0"/>
+        </a:p>
+      </dgm:t>
+    </dgm:pt>
+    <dgm:pt modelId="{1D324399-7668-4F17-AEB8-B1621F96949A}" type="parTrans" cxnId="{FB65B0B4-557E-4C4C-9912-C17C61EDF561}">
+      <dgm:prSet/>
+      <dgm:spPr/>
+      <dgm:t>
+        <a:bodyPr/>
+        <a:lstStyle/>
+        <a:p>
+          <a:endParaRPr lang="en-US"/>
+        </a:p>
+      </dgm:t>
+    </dgm:pt>
+    <dgm:pt modelId="{87C0E8E1-14D5-497A-89D4-6601A0BA4E55}" type="sibTrans" cxnId="{FB65B0B4-557E-4C4C-9912-C17C61EDF561}">
+      <dgm:prSet/>
+      <dgm:spPr/>
+      <dgm:t>
+        <a:bodyPr/>
+        <a:lstStyle/>
+        <a:p>
+          <a:endParaRPr lang="en-US"/>
+        </a:p>
+      </dgm:t>
+    </dgm:pt>
+    <dgm:pt modelId="{E7881928-775C-4863-B452-BA0D3343F192}">
+      <dgm:prSet/>
+      <dgm:spPr/>
+      <dgm:t>
+        <a:bodyPr/>
+        <a:lstStyle/>
+        <a:p>
+          <a:r>
+            <a:rPr lang="es-MX"/>
+            <a:t>Usar las herramientas correctas de la manera correcta, entendiendo lo que se pide</a:t>
+          </a:r>
+          <a:endParaRPr lang="en-US"/>
+        </a:p>
+      </dgm:t>
+    </dgm:pt>
+    <dgm:pt modelId="{725E0691-A572-44E2-A01B-20A887110AA8}" type="parTrans" cxnId="{E5D97829-C64D-4FA6-8FC4-AC63B41ED43F}">
+      <dgm:prSet/>
+      <dgm:spPr/>
+      <dgm:t>
+        <a:bodyPr/>
+        <a:lstStyle/>
+        <a:p>
+          <a:endParaRPr lang="en-US"/>
+        </a:p>
+      </dgm:t>
+    </dgm:pt>
+    <dgm:pt modelId="{35A22022-A164-4B62-B983-B45DC35A32D4}" type="sibTrans" cxnId="{E5D97829-C64D-4FA6-8FC4-AC63B41ED43F}">
+      <dgm:prSet/>
+      <dgm:spPr/>
+      <dgm:t>
+        <a:bodyPr/>
+        <a:lstStyle/>
+        <a:p>
+          <a:endParaRPr lang="en-US"/>
+        </a:p>
+      </dgm:t>
+    </dgm:pt>
+    <dgm:pt modelId="{770BE5C5-6ACC-44AE-A362-0235DA1B106F}">
+      <dgm:prSet/>
+      <dgm:spPr/>
+      <dgm:t>
+        <a:bodyPr/>
+        <a:lstStyle/>
+        <a:p>
+          <a:r>
+            <a:rPr lang="es-MX" dirty="0"/>
+            <a:t>Selección y adaptación de </a:t>
+          </a:r>
+          <a:r>
+            <a:rPr lang="es-MX" i="1" dirty="0"/>
+            <a:t>skills</a:t>
+          </a:r>
+          <a:r>
+            <a:rPr lang="es-MX" dirty="0"/>
+            <a:t> para desarrollo agentico</a:t>
+          </a:r>
+          <a:endParaRPr lang="en-US" dirty="0"/>
+        </a:p>
+      </dgm:t>
+    </dgm:pt>
+    <dgm:pt modelId="{60301AF9-EAF1-4E00-8204-43BB0BB17739}" type="parTrans" cxnId="{C69BC9B3-0822-4ECE-90C4-98DBE7CC0E8B}">
+      <dgm:prSet/>
+      <dgm:spPr/>
+      <dgm:t>
+        <a:bodyPr/>
+        <a:lstStyle/>
+        <a:p>
+          <a:endParaRPr lang="en-US"/>
+        </a:p>
+      </dgm:t>
+    </dgm:pt>
+    <dgm:pt modelId="{E2DB3E65-6417-4228-93F9-56A088235473}" type="sibTrans" cxnId="{C69BC9B3-0822-4ECE-90C4-98DBE7CC0E8B}">
+      <dgm:prSet/>
+      <dgm:spPr/>
+      <dgm:t>
+        <a:bodyPr/>
+        <a:lstStyle/>
+        <a:p>
+          <a:endParaRPr lang="en-US"/>
+        </a:p>
+      </dgm:t>
+    </dgm:pt>
+    <dgm:pt modelId="{A81C4D30-DD5E-4E85-918F-2AF8ED548FCE}">
+      <dgm:prSet/>
+      <dgm:spPr/>
+      <dgm:t>
+        <a:bodyPr/>
+        <a:lstStyle/>
+        <a:p>
+          <a:r>
+            <a:rPr lang="es-MX" dirty="0"/>
+            <a:t>Desarrollo de blogs, tableros e historias de datos apoyads con LLMs, pero de la manera correcta</a:t>
+          </a:r>
+          <a:endParaRPr lang="en-US" dirty="0"/>
+        </a:p>
+      </dgm:t>
+    </dgm:pt>
+    <dgm:pt modelId="{25E4E148-21BD-46EF-B61F-0402C9B2C398}" type="parTrans" cxnId="{E4C195D3-AA34-46B4-8950-AFF8510D0F56}">
+      <dgm:prSet/>
+      <dgm:spPr/>
+      <dgm:t>
+        <a:bodyPr/>
+        <a:lstStyle/>
+        <a:p>
+          <a:endParaRPr lang="en-US"/>
+        </a:p>
+      </dgm:t>
+    </dgm:pt>
+    <dgm:pt modelId="{14D25B82-C1C5-4B6A-978F-37372A70C643}" type="sibTrans" cxnId="{E4C195D3-AA34-46B4-8950-AFF8510D0F56}">
+      <dgm:prSet/>
+      <dgm:spPr/>
+      <dgm:t>
+        <a:bodyPr/>
+        <a:lstStyle/>
+        <a:p>
+          <a:endParaRPr lang="en-US"/>
+        </a:p>
+      </dgm:t>
+    </dgm:pt>
+    <dgm:pt modelId="{72C44E3B-FDCC-D643-B0A3-F6C89EB97E81}" type="pres">
+      <dgm:prSet presAssocID="{0136F9B8-9D65-49F3-BF44-B2AFDC1BA388}" presName="linear" presStyleCnt="0">
+        <dgm:presLayoutVars>
+          <dgm:animLvl val="lvl"/>
+          <dgm:resizeHandles val="exact"/>
+        </dgm:presLayoutVars>
+      </dgm:prSet>
+      <dgm:spPr/>
+    </dgm:pt>
+    <dgm:pt modelId="{3EF3C996-C09E-E841-B782-D27539B692DD}" type="pres">
+      <dgm:prSet presAssocID="{28C2F14F-4FA2-471F-B614-EAF7A05F564E}" presName="parentText" presStyleLbl="node1" presStyleIdx="0" presStyleCnt="4">
+        <dgm:presLayoutVars>
+          <dgm:chMax val="0"/>
+          <dgm:bulletEnabled val="1"/>
+        </dgm:presLayoutVars>
+      </dgm:prSet>
+      <dgm:spPr/>
+    </dgm:pt>
+    <dgm:pt modelId="{52141589-174E-EB40-A90B-80C76D0776B3}" type="pres">
+      <dgm:prSet presAssocID="{87C0E8E1-14D5-497A-89D4-6601A0BA4E55}" presName="spacer" presStyleCnt="0"/>
+      <dgm:spPr/>
+    </dgm:pt>
+    <dgm:pt modelId="{94B43A2B-6484-0B47-A3AF-2E600FDE189E}" type="pres">
+      <dgm:prSet presAssocID="{E7881928-775C-4863-B452-BA0D3343F192}" presName="parentText" presStyleLbl="node1" presStyleIdx="1" presStyleCnt="4">
+        <dgm:presLayoutVars>
+          <dgm:chMax val="0"/>
+          <dgm:bulletEnabled val="1"/>
+        </dgm:presLayoutVars>
+      </dgm:prSet>
+      <dgm:spPr/>
+    </dgm:pt>
+    <dgm:pt modelId="{86B3FE81-1E98-0D4A-8929-A6E54F44B951}" type="pres">
+      <dgm:prSet presAssocID="{35A22022-A164-4B62-B983-B45DC35A32D4}" presName="spacer" presStyleCnt="0"/>
+      <dgm:spPr/>
+    </dgm:pt>
+    <dgm:pt modelId="{514E346E-8134-FB46-AB85-CC4866232E5B}" type="pres">
+      <dgm:prSet presAssocID="{770BE5C5-6ACC-44AE-A362-0235DA1B106F}" presName="parentText" presStyleLbl="node1" presStyleIdx="2" presStyleCnt="4">
+        <dgm:presLayoutVars>
+          <dgm:chMax val="0"/>
+          <dgm:bulletEnabled val="1"/>
+        </dgm:presLayoutVars>
+      </dgm:prSet>
+      <dgm:spPr/>
+    </dgm:pt>
+    <dgm:pt modelId="{3A459C45-1CE4-4B46-8A66-9360952FC51F}" type="pres">
+      <dgm:prSet presAssocID="{E2DB3E65-6417-4228-93F9-56A088235473}" presName="spacer" presStyleCnt="0"/>
+      <dgm:spPr/>
+    </dgm:pt>
+    <dgm:pt modelId="{CEA4657B-98A1-0045-9D4F-834403F9005B}" type="pres">
+      <dgm:prSet presAssocID="{A81C4D30-DD5E-4E85-918F-2AF8ED548FCE}" presName="parentText" presStyleLbl="node1" presStyleIdx="3" presStyleCnt="4">
+        <dgm:presLayoutVars>
+          <dgm:chMax val="0"/>
+          <dgm:bulletEnabled val="1"/>
+        </dgm:presLayoutVars>
+      </dgm:prSet>
+      <dgm:spPr/>
+    </dgm:pt>
+  </dgm:ptLst>
+  <dgm:cxnLst>
+    <dgm:cxn modelId="{04351C28-40D4-494B-A5FA-7270DF9A0ED9}" type="presOf" srcId="{E7881928-775C-4863-B452-BA0D3343F192}" destId="{94B43A2B-6484-0B47-A3AF-2E600FDE189E}" srcOrd="0" destOrd="0" presId="urn:microsoft.com/office/officeart/2005/8/layout/vList2"/>
+    <dgm:cxn modelId="{E5D97829-C64D-4FA6-8FC4-AC63B41ED43F}" srcId="{0136F9B8-9D65-49F3-BF44-B2AFDC1BA388}" destId="{E7881928-775C-4863-B452-BA0D3343F192}" srcOrd="1" destOrd="0" parTransId="{725E0691-A572-44E2-A01B-20A887110AA8}" sibTransId="{35A22022-A164-4B62-B983-B45DC35A32D4}"/>
+    <dgm:cxn modelId="{9D11CB53-5565-F44D-8AF0-8AC4FDF24236}" type="presOf" srcId="{0136F9B8-9D65-49F3-BF44-B2AFDC1BA388}" destId="{72C44E3B-FDCC-D643-B0A3-F6C89EB97E81}" srcOrd="0" destOrd="0" presId="urn:microsoft.com/office/officeart/2005/8/layout/vList2"/>
+    <dgm:cxn modelId="{DF70F7A8-9B30-7842-89F8-21C0C20C2A86}" type="presOf" srcId="{A81C4D30-DD5E-4E85-918F-2AF8ED548FCE}" destId="{CEA4657B-98A1-0045-9D4F-834403F9005B}" srcOrd="0" destOrd="0" presId="urn:microsoft.com/office/officeart/2005/8/layout/vList2"/>
+    <dgm:cxn modelId="{C69BC9B3-0822-4ECE-90C4-98DBE7CC0E8B}" srcId="{0136F9B8-9D65-49F3-BF44-B2AFDC1BA388}" destId="{770BE5C5-6ACC-44AE-A362-0235DA1B106F}" srcOrd="2" destOrd="0" parTransId="{60301AF9-EAF1-4E00-8204-43BB0BB17739}" sibTransId="{E2DB3E65-6417-4228-93F9-56A088235473}"/>
+    <dgm:cxn modelId="{FB65B0B4-557E-4C4C-9912-C17C61EDF561}" srcId="{0136F9B8-9D65-49F3-BF44-B2AFDC1BA388}" destId="{28C2F14F-4FA2-471F-B614-EAF7A05F564E}" srcOrd="0" destOrd="0" parTransId="{1D324399-7668-4F17-AEB8-B1621F96949A}" sibTransId="{87C0E8E1-14D5-497A-89D4-6601A0BA4E55}"/>
+    <dgm:cxn modelId="{E4C195D3-AA34-46B4-8950-AFF8510D0F56}" srcId="{0136F9B8-9D65-49F3-BF44-B2AFDC1BA388}" destId="{A81C4D30-DD5E-4E85-918F-2AF8ED548FCE}" srcOrd="3" destOrd="0" parTransId="{25E4E148-21BD-46EF-B61F-0402C9B2C398}" sibTransId="{14D25B82-C1C5-4B6A-978F-37372A70C643}"/>
+    <dgm:cxn modelId="{5AABDFF5-72AC-6041-8382-3F44C3BF1861}" type="presOf" srcId="{770BE5C5-6ACC-44AE-A362-0235DA1B106F}" destId="{514E346E-8134-FB46-AB85-CC4866232E5B}" srcOrd="0" destOrd="0" presId="urn:microsoft.com/office/officeart/2005/8/layout/vList2"/>
+    <dgm:cxn modelId="{BA594EFB-9602-0846-9EE3-180888749310}" type="presOf" srcId="{28C2F14F-4FA2-471F-B614-EAF7A05F564E}" destId="{3EF3C996-C09E-E841-B782-D27539B692DD}" srcOrd="0" destOrd="0" presId="urn:microsoft.com/office/officeart/2005/8/layout/vList2"/>
+    <dgm:cxn modelId="{36CC5C6B-4870-AE4F-ADB5-3C38635D7E0D}" type="presParOf" srcId="{72C44E3B-FDCC-D643-B0A3-F6C89EB97E81}" destId="{3EF3C996-C09E-E841-B782-D27539B692DD}" srcOrd="0" destOrd="0" presId="urn:microsoft.com/office/officeart/2005/8/layout/vList2"/>
+    <dgm:cxn modelId="{1AE20B6F-764B-0F49-8E8E-EF180E9DD24C}" type="presParOf" srcId="{72C44E3B-FDCC-D643-B0A3-F6C89EB97E81}" destId="{52141589-174E-EB40-A90B-80C76D0776B3}" srcOrd="1" destOrd="0" presId="urn:microsoft.com/office/officeart/2005/8/layout/vList2"/>
+    <dgm:cxn modelId="{22E0F8FE-257F-A547-8CE6-CF07F0BE67C9}" type="presParOf" srcId="{72C44E3B-FDCC-D643-B0A3-F6C89EB97E81}" destId="{94B43A2B-6484-0B47-A3AF-2E600FDE189E}" srcOrd="2" destOrd="0" presId="urn:microsoft.com/office/officeart/2005/8/layout/vList2"/>
+    <dgm:cxn modelId="{C7174064-865B-B84E-B29A-02B7F186E7F5}" type="presParOf" srcId="{72C44E3B-FDCC-D643-B0A3-F6C89EB97E81}" destId="{86B3FE81-1E98-0D4A-8929-A6E54F44B951}" srcOrd="3" destOrd="0" presId="urn:microsoft.com/office/officeart/2005/8/layout/vList2"/>
+    <dgm:cxn modelId="{A4DAEBAE-906A-754A-8005-9CF13691ADC1}" type="presParOf" srcId="{72C44E3B-FDCC-D643-B0A3-F6C89EB97E81}" destId="{514E346E-8134-FB46-AB85-CC4866232E5B}" srcOrd="4" destOrd="0" presId="urn:microsoft.com/office/officeart/2005/8/layout/vList2"/>
+    <dgm:cxn modelId="{5B7D8B3D-2CFE-F148-9A0F-7BE34EDF2AF3}" type="presParOf" srcId="{72C44E3B-FDCC-D643-B0A3-F6C89EB97E81}" destId="{3A459C45-1CE4-4B46-8A66-9360952FC51F}" srcOrd="5" destOrd="0" presId="urn:microsoft.com/office/officeart/2005/8/layout/vList2"/>
+    <dgm:cxn modelId="{42AAE9E2-C37A-F343-822B-D24D8163FBED}" type="presParOf" srcId="{72C44E3B-FDCC-D643-B0A3-F6C89EB97E81}" destId="{CEA4657B-98A1-0045-9D4F-834403F9005B}" srcOrd="6" destOrd="0" presId="urn:microsoft.com/office/officeart/2005/8/layout/vList2"/>
+  </dgm:cxnLst>
+  <dgm:bg/>
+  <dgm:whole/>
+  <dgm:extLst>
+    <a:ext uri="http://schemas.microsoft.com/office/drawing/2008/diagram">
+      <dsp:dataModelExt xmlns:dsp="http://schemas.microsoft.com/office/drawing/2008/diagram" relId="rId6" minVer="http://schemas.openxmlformats.org/drawingml/2006/diagram"/>
+    </a:ext>
+  </dgm:extLst>
+</dgm:dataModel>
+</file>
+
+<file path=ppt/diagrams/data8.xml><?xml version="1.0" encoding="utf-8"?>
+<dgm:dataModel xmlns:dgm="http://schemas.openxmlformats.org/drawingml/2006/diagram" xmlns:a="http://schemas.openxmlformats.org/drawingml/2006/main">
+  <dgm:ptLst>
     <dgm:pt modelId="{0443E328-51BD-4BA3-AD1E-8AFED07F7BC4}" type="doc">
       <dgm:prSet loTypeId="urn:microsoft.com/office/officeart/2018/2/layout/IconVerticalSolidList" loCatId="icon" qsTypeId="urn:microsoft.com/office/officeart/2005/8/quickstyle/simple1" qsCatId="simple" csTypeId="urn:microsoft.com/office/officeart/2018/5/colors/Iconchunking_neutralicontext_colorful1" csCatId="colorful" phldr="1"/>
       <dgm:spPr/>
@@ -9201,7 +10240,7 @@
           </a:pPr>
           <a:r>
             <a:rPr lang="es-ES_tradnl" dirty="0"/>
-            <a:t>Comunicación (20%)</a:t>
+            <a:t>Comunicación (10%)</a:t>
           </a:r>
           <a:endParaRPr lang="en-US" dirty="0"/>
         </a:p>
@@ -9313,6 +10352,47 @@
         </a:p>
       </dgm:t>
     </dgm:pt>
+    <dgm:pt modelId="{6EA92340-6171-6542-9048-E32414872175}">
+      <dgm:prSet phldrT="[Texto]"/>
+      <dgm:spPr/>
+      <dgm:t>
+        <a:bodyPr/>
+        <a:lstStyle/>
+        <a:p>
+          <a:pPr>
+            <a:lnSpc>
+              <a:spcPct val="100000"/>
+            </a:lnSpc>
+          </a:pPr>
+          <a:r>
+            <a:rPr lang="es-MX" dirty="0"/>
+            <a:t>Actividades complementarias (10%)</a:t>
+          </a:r>
+        </a:p>
+      </dgm:t>
+    </dgm:pt>
+    <dgm:pt modelId="{35B2C016-EEB8-A448-9A0F-B7293C5D2CD9}" type="parTrans" cxnId="{90126D92-E85A-2A44-8F32-B1D3677FBD1E}">
+      <dgm:prSet/>
+      <dgm:spPr/>
+      <dgm:t>
+        <a:bodyPr/>
+        <a:lstStyle/>
+        <a:p>
+          <a:endParaRPr lang="es-MX"/>
+        </a:p>
+      </dgm:t>
+    </dgm:pt>
+    <dgm:pt modelId="{19A48FFF-2F83-0049-BBA1-3F088576AE1F}" type="sibTrans" cxnId="{90126D92-E85A-2A44-8F32-B1D3677FBD1E}">
+      <dgm:prSet/>
+      <dgm:spPr/>
+      <dgm:t>
+        <a:bodyPr/>
+        <a:lstStyle/>
+        <a:p>
+          <a:endParaRPr lang="es-MX"/>
+        </a:p>
+      </dgm:t>
+    </dgm:pt>
     <dgm:pt modelId="{A2FBEFAB-B635-4A73-BBF3-D58C8243FB5C}" type="pres">
       <dgm:prSet presAssocID="{0443E328-51BD-4BA3-AD1E-8AFED07F7BC4}" presName="root" presStyleCnt="0">
         <dgm:presLayoutVars>
@@ -9327,20 +10407,20 @@
       <dgm:spPr/>
     </dgm:pt>
     <dgm:pt modelId="{374BCFB3-F01A-4A36-BE40-45429F28DE3F}" type="pres">
-      <dgm:prSet presAssocID="{445CA8A5-8ECD-432D-8D36-5FEB081C9497}" presName="bgRect" presStyleLbl="bgShp" presStyleIdx="0" presStyleCnt="3"/>
+      <dgm:prSet presAssocID="{445CA8A5-8ECD-432D-8D36-5FEB081C9497}" presName="bgRect" presStyleLbl="bgShp" presStyleIdx="0" presStyleCnt="4"/>
       <dgm:spPr/>
     </dgm:pt>
     <dgm:pt modelId="{97B6D049-36C6-4B11-9FF2-3EB265100284}" type="pres">
-      <dgm:prSet presAssocID="{445CA8A5-8ECD-432D-8D36-5FEB081C9497}" presName="iconRect" presStyleLbl="node1" presStyleIdx="0" presStyleCnt="3"/>
+      <dgm:prSet presAssocID="{445CA8A5-8ECD-432D-8D36-5FEB081C9497}" presName="iconRect" presStyleLbl="node1" presStyleIdx="0" presStyleCnt="4"/>
       <dgm:spPr>
         <a:blipFill>
-          <a:blip xmlns:r="http://schemas.openxmlformats.org/officeDocument/2006/relationships" r:embed="rId1">
+          <a:blip xmlns:r="http://schemas.openxmlformats.org/officeDocument/2006/relationships">
             <a:extLst>
               <a:ext uri="{28A0092B-C50C-407E-A947-70E740481C1C}">
                 <a14:useLocalDpi xmlns:a14="http://schemas.microsoft.com/office/drawing/2010/main" val="0"/>
               </a:ext>
               <a:ext uri="{96DAC541-7B7A-43D3-8B79-37D633B846F1}">
-                <asvg:svgBlip xmlns:asvg="http://schemas.microsoft.com/office/drawing/2016/SVG/main" r:embed="rId2"/>
+                <asvg:svgBlip xmlns:asvg="http://schemas.microsoft.com/office/drawing/2016/SVG/main" r:embed="rId1"/>
               </a:ext>
             </a:extLst>
           </a:blip>
@@ -9364,7 +10444,7 @@
       <dgm:spPr/>
     </dgm:pt>
     <dgm:pt modelId="{81EAB479-D3BC-453D-94FA-D900308FEF21}" type="pres">
-      <dgm:prSet presAssocID="{445CA8A5-8ECD-432D-8D36-5FEB081C9497}" presName="parTx" presStyleLbl="revTx" presStyleIdx="0" presStyleCnt="3">
+      <dgm:prSet presAssocID="{445CA8A5-8ECD-432D-8D36-5FEB081C9497}" presName="parTx" presStyleLbl="revTx" presStyleIdx="0" presStyleCnt="4">
         <dgm:presLayoutVars>
           <dgm:chMax val="0"/>
           <dgm:chPref val="0"/>
@@ -9381,20 +10461,20 @@
       <dgm:spPr/>
     </dgm:pt>
     <dgm:pt modelId="{11F50669-F2B2-4056-9EF7-FB04D23E2162}" type="pres">
-      <dgm:prSet presAssocID="{AEBDDF70-C768-4986-BE09-1C86EFCB5A0E}" presName="bgRect" presStyleLbl="bgShp" presStyleIdx="1" presStyleCnt="3"/>
+      <dgm:prSet presAssocID="{AEBDDF70-C768-4986-BE09-1C86EFCB5A0E}" presName="bgRect" presStyleLbl="bgShp" presStyleIdx="1" presStyleCnt="4"/>
       <dgm:spPr/>
     </dgm:pt>
     <dgm:pt modelId="{A671F072-3C18-455C-9646-D1EB7A47A2C2}" type="pres">
-      <dgm:prSet presAssocID="{AEBDDF70-C768-4986-BE09-1C86EFCB5A0E}" presName="iconRect" presStyleLbl="node1" presStyleIdx="1" presStyleCnt="3"/>
+      <dgm:prSet presAssocID="{AEBDDF70-C768-4986-BE09-1C86EFCB5A0E}" presName="iconRect" presStyleLbl="node1" presStyleIdx="1" presStyleCnt="4"/>
       <dgm:spPr>
         <a:blipFill>
-          <a:blip xmlns:r="http://schemas.openxmlformats.org/officeDocument/2006/relationships" r:embed="rId3">
+          <a:blip xmlns:r="http://schemas.openxmlformats.org/officeDocument/2006/relationships">
             <a:extLst>
               <a:ext uri="{28A0092B-C50C-407E-A947-70E740481C1C}">
                 <a14:useLocalDpi xmlns:a14="http://schemas.microsoft.com/office/drawing/2010/main" val="0"/>
               </a:ext>
               <a:ext uri="{96DAC541-7B7A-43D3-8B79-37D633B846F1}">
-                <asvg:svgBlip xmlns:asvg="http://schemas.microsoft.com/office/drawing/2016/SVG/main" r:embed="rId4"/>
+                <asvg:svgBlip xmlns:asvg="http://schemas.microsoft.com/office/drawing/2016/SVG/main" r:embed="rId2"/>
               </a:ext>
             </a:extLst>
           </a:blip>
@@ -9417,7 +10497,7 @@
       <dgm:spPr/>
     </dgm:pt>
     <dgm:pt modelId="{AEB89928-71F6-479E-A052-5B75387B8AA2}" type="pres">
-      <dgm:prSet presAssocID="{AEBDDF70-C768-4986-BE09-1C86EFCB5A0E}" presName="parTx" presStyleLbl="revTx" presStyleIdx="1" presStyleCnt="3">
+      <dgm:prSet presAssocID="{AEBDDF70-C768-4986-BE09-1C86EFCB5A0E}" presName="parTx" presStyleLbl="revTx" presStyleIdx="1" presStyleCnt="4">
         <dgm:presLayoutVars>
           <dgm:chMax val="0"/>
           <dgm:chPref val="0"/>
@@ -9434,17 +10514,17 @@
       <dgm:spPr/>
     </dgm:pt>
     <dgm:pt modelId="{446856D0-AFA5-411F-861E-D914B23267E8}" type="pres">
-      <dgm:prSet presAssocID="{6587CF64-EA1F-4880-A1D5-A0746820ACDD}" presName="bgRect" presStyleLbl="bgShp" presStyleIdx="2" presStyleCnt="3"/>
+      <dgm:prSet presAssocID="{6587CF64-EA1F-4880-A1D5-A0746820ACDD}" presName="bgRect" presStyleLbl="bgShp" presStyleIdx="2" presStyleCnt="4"/>
       <dgm:spPr/>
     </dgm:pt>
     <dgm:pt modelId="{C0CCEF74-8932-4A5A-A256-4067B9AB063D}" type="pres">
-      <dgm:prSet presAssocID="{6587CF64-EA1F-4880-A1D5-A0746820ACDD}" presName="iconRect" presStyleLbl="node1" presStyleIdx="2" presStyleCnt="3"/>
+      <dgm:prSet presAssocID="{6587CF64-EA1F-4880-A1D5-A0746820ACDD}" presName="iconRect" presStyleLbl="node1" presStyleIdx="2" presStyleCnt="4"/>
       <dgm:spPr>
         <a:blipFill>
-          <a:blip xmlns:r="http://schemas.openxmlformats.org/officeDocument/2006/relationships" r:embed="rId5">
+          <a:blip xmlns:r="http://schemas.openxmlformats.org/officeDocument/2006/relationships">
             <a:extLst>
               <a:ext uri="{96DAC541-7B7A-43D3-8B79-37D633B846F1}">
-                <asvg:svgBlip xmlns:asvg="http://schemas.microsoft.com/office/drawing/2016/SVG/main" r:embed="rId6"/>
+                <asvg:svgBlip xmlns:asvg="http://schemas.microsoft.com/office/drawing/2016/SVG/main" r:embed="rId3"/>
               </a:ext>
             </a:extLst>
           </a:blip>
@@ -9468,7 +10548,55 @@
       <dgm:spPr/>
     </dgm:pt>
     <dgm:pt modelId="{5FEF1523-D42B-4E36-92A0-982AE249D38B}" type="pres">
-      <dgm:prSet presAssocID="{6587CF64-EA1F-4880-A1D5-A0746820ACDD}" presName="parTx" presStyleLbl="revTx" presStyleIdx="2" presStyleCnt="3">
+      <dgm:prSet presAssocID="{6587CF64-EA1F-4880-A1D5-A0746820ACDD}" presName="parTx" presStyleLbl="revTx" presStyleIdx="2" presStyleCnt="4">
+        <dgm:presLayoutVars>
+          <dgm:chMax val="0"/>
+          <dgm:chPref val="0"/>
+        </dgm:presLayoutVars>
+      </dgm:prSet>
+      <dgm:spPr/>
+    </dgm:pt>
+    <dgm:pt modelId="{CD89D645-0CE3-5142-971B-43C3E9D1B088}" type="pres">
+      <dgm:prSet presAssocID="{6CD8499F-8648-4F4F-BEE1-7C869552D595}" presName="sibTrans" presStyleCnt="0"/>
+      <dgm:spPr/>
+    </dgm:pt>
+    <dgm:pt modelId="{C3722791-F5E6-B648-A031-08B30D747552}" type="pres">
+      <dgm:prSet presAssocID="{6EA92340-6171-6542-9048-E32414872175}" presName="compNode" presStyleCnt="0"/>
+      <dgm:spPr/>
+    </dgm:pt>
+    <dgm:pt modelId="{E86AB438-2BEF-3E4C-9E92-DB9AF34E5D17}" type="pres">
+      <dgm:prSet presAssocID="{6EA92340-6171-6542-9048-E32414872175}" presName="bgRect" presStyleLbl="bgShp" presStyleIdx="3" presStyleCnt="4"/>
+      <dgm:spPr/>
+    </dgm:pt>
+    <dgm:pt modelId="{4B7675ED-2664-9A48-B335-82727094FEC6}" type="pres">
+      <dgm:prSet presAssocID="{6EA92340-6171-6542-9048-E32414872175}" presName="iconRect" presStyleLbl="node1" presStyleIdx="3" presStyleCnt="4"/>
+      <dgm:spPr>
+        <a:blipFill>
+          <a:blip xmlns:r="http://schemas.openxmlformats.org/officeDocument/2006/relationships">
+            <a:extLst>
+              <a:ext uri="{96DAC541-7B7A-43D3-8B79-37D633B846F1}">
+                <asvg:svgBlip xmlns:asvg="http://schemas.microsoft.com/office/drawing/2016/SVG/main" r:embed="rId4"/>
+              </a:ext>
+            </a:extLst>
+          </a:blip>
+          <a:srcRect/>
+          <a:stretch>
+            <a:fillRect/>
+          </a:stretch>
+        </a:blipFill>
+      </dgm:spPr>
+      <dgm:extLst>
+        <a:ext uri="{E40237B7-FDA0-4F09-8148-C483321AD2D9}">
+          <dgm14:cNvPr xmlns:dgm14="http://schemas.microsoft.com/office/drawing/2010/diagram" id="0" name="" descr="Yin And Yang con relleno sólido"/>
+        </a:ext>
+      </dgm:extLst>
+    </dgm:pt>
+    <dgm:pt modelId="{0B9A4A1A-28DC-6448-BF47-9D59E17FAABB}" type="pres">
+      <dgm:prSet presAssocID="{6EA92340-6171-6542-9048-E32414872175}" presName="spaceRect" presStyleCnt="0"/>
+      <dgm:spPr/>
+    </dgm:pt>
+    <dgm:pt modelId="{08432978-B3CD-3046-BE7B-4B9418BA455C}" type="pres">
+      <dgm:prSet presAssocID="{6EA92340-6171-6542-9048-E32414872175}" presName="parTx" presStyleLbl="revTx" presStyleIdx="3" presStyleCnt="4">
         <dgm:presLayoutVars>
           <dgm:chMax val="0"/>
           <dgm:chPref val="0"/>
@@ -9481,9 +10609,11 @@
     <dgm:cxn modelId="{334E0021-F3D8-4E6B-9700-86E85D50501C}" type="presOf" srcId="{445CA8A5-8ECD-432D-8D36-5FEB081C9497}" destId="{81EAB479-D3BC-453D-94FA-D900308FEF21}" srcOrd="0" destOrd="0" presId="urn:microsoft.com/office/officeart/2018/2/layout/IconVerticalSolidList"/>
     <dgm:cxn modelId="{733E693C-58DB-4234-8668-CDD9AC119ADA}" type="presOf" srcId="{0443E328-51BD-4BA3-AD1E-8AFED07F7BC4}" destId="{A2FBEFAB-B635-4A73-BBF3-D58C8243FB5C}" srcOrd="0" destOrd="0" presId="urn:microsoft.com/office/officeart/2018/2/layout/IconVerticalSolidList"/>
     <dgm:cxn modelId="{34D9C169-ADE1-4DAE-9D19-DF38A5C19ECA}" srcId="{0443E328-51BD-4BA3-AD1E-8AFED07F7BC4}" destId="{445CA8A5-8ECD-432D-8D36-5FEB081C9497}" srcOrd="0" destOrd="0" parTransId="{2CB2B3B9-2569-40FC-8A51-5EE980121C79}" sibTransId="{BB1A7D09-6637-4DD8-A0EE-7976827335F2}"/>
+    <dgm:cxn modelId="{90126D92-E85A-2A44-8F32-B1D3677FBD1E}" srcId="{0443E328-51BD-4BA3-AD1E-8AFED07F7BC4}" destId="{6EA92340-6171-6542-9048-E32414872175}" srcOrd="3" destOrd="0" parTransId="{35B2C016-EEB8-A448-9A0F-B7293C5D2CD9}" sibTransId="{19A48FFF-2F83-0049-BBA1-3F088576AE1F}"/>
     <dgm:cxn modelId="{3A54DCAE-163E-48CC-B609-C1797EFA0F23}" srcId="{0443E328-51BD-4BA3-AD1E-8AFED07F7BC4}" destId="{AEBDDF70-C768-4986-BE09-1C86EFCB5A0E}" srcOrd="1" destOrd="0" parTransId="{C853497B-F5E8-47A7-87D8-9DD178B5C1ED}" sibTransId="{F76C960D-E08B-4BA5-9BAE-551148ADF194}"/>
     <dgm:cxn modelId="{4837A0B3-AF14-4505-A2E3-D0C3828EF156}" type="presOf" srcId="{AEBDDF70-C768-4986-BE09-1C86EFCB5A0E}" destId="{AEB89928-71F6-479E-A052-5B75387B8AA2}" srcOrd="0" destOrd="0" presId="urn:microsoft.com/office/officeart/2018/2/layout/IconVerticalSolidList"/>
     <dgm:cxn modelId="{2EAF30D1-2888-42EA-857F-D042A4C7C2F2}" type="presOf" srcId="{6587CF64-EA1F-4880-A1D5-A0746820ACDD}" destId="{5FEF1523-D42B-4E36-92A0-982AE249D38B}" srcOrd="0" destOrd="0" presId="urn:microsoft.com/office/officeart/2018/2/layout/IconVerticalSolidList"/>
+    <dgm:cxn modelId="{9D126CE1-A3E4-E849-AAF4-27DDA5A36610}" type="presOf" srcId="{6EA92340-6171-6542-9048-E32414872175}" destId="{08432978-B3CD-3046-BE7B-4B9418BA455C}" srcOrd="0" destOrd="0" presId="urn:microsoft.com/office/officeart/2018/2/layout/IconVerticalSolidList"/>
     <dgm:cxn modelId="{1A8A52F5-620F-4DD9-8167-D5117BBBB6B9}" srcId="{0443E328-51BD-4BA3-AD1E-8AFED07F7BC4}" destId="{6587CF64-EA1F-4880-A1D5-A0746820ACDD}" srcOrd="2" destOrd="0" parTransId="{C678844D-426A-4E42-A84C-1E755841F0C9}" sibTransId="{6CD8499F-8648-4F4F-BEE1-7C869552D595}"/>
     <dgm:cxn modelId="{027BA26D-413D-445B-A1BA-5BC479BF282D}" type="presParOf" srcId="{A2FBEFAB-B635-4A73-BBF3-D58C8243FB5C}" destId="{53034DF4-84AE-4A73-961C-C602733E98FB}" srcOrd="0" destOrd="0" presId="urn:microsoft.com/office/officeart/2018/2/layout/IconVerticalSolidList"/>
     <dgm:cxn modelId="{EC1E0803-1FEA-45D2-A1F9-FC4648F302E6}" type="presParOf" srcId="{53034DF4-84AE-4A73-961C-C602733E98FB}" destId="{374BCFB3-F01A-4A36-BE40-45429F28DE3F}" srcOrd="0" destOrd="0" presId="urn:microsoft.com/office/officeart/2018/2/layout/IconVerticalSolidList"/>
@@ -9502,6 +10632,12 @@
     <dgm:cxn modelId="{C7C1A6A3-36C8-4BE2-99A5-09EC5B4616B7}" type="presParOf" srcId="{C7C9C387-9FB6-4206-B625-2715E1C3F567}" destId="{C0CCEF74-8932-4A5A-A256-4067B9AB063D}" srcOrd="1" destOrd="0" presId="urn:microsoft.com/office/officeart/2018/2/layout/IconVerticalSolidList"/>
     <dgm:cxn modelId="{B09ED758-C231-4600-A957-D087C1EF9B4D}" type="presParOf" srcId="{C7C9C387-9FB6-4206-B625-2715E1C3F567}" destId="{5548351F-834D-4E4E-8BE8-3C61A953CC95}" srcOrd="2" destOrd="0" presId="urn:microsoft.com/office/officeart/2018/2/layout/IconVerticalSolidList"/>
     <dgm:cxn modelId="{C6B3DA1A-BD65-452B-8BF9-99B8220E38CC}" type="presParOf" srcId="{C7C9C387-9FB6-4206-B625-2715E1C3F567}" destId="{5FEF1523-D42B-4E36-92A0-982AE249D38B}" srcOrd="3" destOrd="0" presId="urn:microsoft.com/office/officeart/2018/2/layout/IconVerticalSolidList"/>
+    <dgm:cxn modelId="{B4054F3D-D3C7-0044-9761-6D5924EEAD88}" type="presParOf" srcId="{A2FBEFAB-B635-4A73-BBF3-D58C8243FB5C}" destId="{CD89D645-0CE3-5142-971B-43C3E9D1B088}" srcOrd="5" destOrd="0" presId="urn:microsoft.com/office/officeart/2018/2/layout/IconVerticalSolidList"/>
+    <dgm:cxn modelId="{8717980D-490D-9447-8828-92655A42078E}" type="presParOf" srcId="{A2FBEFAB-B635-4A73-BBF3-D58C8243FB5C}" destId="{C3722791-F5E6-B648-A031-08B30D747552}" srcOrd="6" destOrd="0" presId="urn:microsoft.com/office/officeart/2018/2/layout/IconVerticalSolidList"/>
+    <dgm:cxn modelId="{95338241-BAB9-F843-85DC-39247D6FF44C}" type="presParOf" srcId="{C3722791-F5E6-B648-A031-08B30D747552}" destId="{E86AB438-2BEF-3E4C-9E92-DB9AF34E5D17}" srcOrd="0" destOrd="0" presId="urn:microsoft.com/office/officeart/2018/2/layout/IconVerticalSolidList"/>
+    <dgm:cxn modelId="{BBD0E351-89ED-EF47-B3D7-43283D904E0B}" type="presParOf" srcId="{C3722791-F5E6-B648-A031-08B30D747552}" destId="{4B7675ED-2664-9A48-B335-82727094FEC6}" srcOrd="1" destOrd="0" presId="urn:microsoft.com/office/officeart/2018/2/layout/IconVerticalSolidList"/>
+    <dgm:cxn modelId="{FA613307-A6B0-6F42-AE8A-66D969A8B64F}" type="presParOf" srcId="{C3722791-F5E6-B648-A031-08B30D747552}" destId="{0B9A4A1A-28DC-6448-BF47-9D59E17FAABB}" srcOrd="2" destOrd="0" presId="urn:microsoft.com/office/officeart/2018/2/layout/IconVerticalSolidList"/>
+    <dgm:cxn modelId="{174AE7A7-5F77-D84E-9B0E-FFC86C2279B6}" type="presParOf" srcId="{C3722791-F5E6-B648-A031-08B30D747552}" destId="{08432978-B3CD-3046-BE7B-4B9418BA455C}" srcOrd="3" destOrd="0" presId="urn:microsoft.com/office/officeart/2018/2/layout/IconVerticalSolidList"/>
   </dgm:cxnLst>
   <dgm:bg/>
   <dgm:whole/>
@@ -9535,13 +10671,13 @@
           <a:avLst/>
         </a:prstGeom>
         <a:blipFill>
-          <a:blip xmlns:r="http://schemas.openxmlformats.org/officeDocument/2006/relationships" r:embed="rId1">
+          <a:blip xmlns:r="http://schemas.openxmlformats.org/officeDocument/2006/relationships">
             <a:extLst>
               <a:ext uri="{28A0092B-C50C-407E-A947-70E740481C1C}">
                 <a14:useLocalDpi xmlns:a14="http://schemas.microsoft.com/office/drawing/2010/main" val="0"/>
               </a:ext>
               <a:ext uri="{96DAC541-7B7A-43D3-8B79-37D633B846F1}">
-                <asvg:svgBlip xmlns:asvg="http://schemas.microsoft.com/office/drawing/2016/SVG/main" r:embed="rId2"/>
+                <asvg:svgBlip xmlns:asvg="http://schemas.microsoft.com/office/drawing/2016/SVG/main" r:embed="rId1"/>
               </a:ext>
             </a:extLst>
           </a:blip>
@@ -9645,13 +10781,13 @@
           <a:avLst/>
         </a:prstGeom>
         <a:blipFill>
-          <a:blip xmlns:r="http://schemas.openxmlformats.org/officeDocument/2006/relationships" r:embed="rId3">
+          <a:blip xmlns:r="http://schemas.openxmlformats.org/officeDocument/2006/relationships">
             <a:extLst>
               <a:ext uri="{28A0092B-C50C-407E-A947-70E740481C1C}">
                 <a14:useLocalDpi xmlns:a14="http://schemas.microsoft.com/office/drawing/2010/main" val="0"/>
               </a:ext>
               <a:ext uri="{96DAC541-7B7A-43D3-8B79-37D633B846F1}">
-                <asvg:svgBlip xmlns:asvg="http://schemas.microsoft.com/office/drawing/2016/SVG/main" r:embed="rId4"/>
+                <asvg:svgBlip xmlns:asvg="http://schemas.microsoft.com/office/drawing/2016/SVG/main" r:embed="rId2"/>
               </a:ext>
             </a:extLst>
           </a:blip>
@@ -9755,13 +10891,13 @@
           <a:avLst/>
         </a:prstGeom>
         <a:blipFill>
-          <a:blip xmlns:r="http://schemas.openxmlformats.org/officeDocument/2006/relationships" r:embed="rId5">
+          <a:blip xmlns:r="http://schemas.openxmlformats.org/officeDocument/2006/relationships">
             <a:extLst>
               <a:ext uri="{28A0092B-C50C-407E-A947-70E740481C1C}">
                 <a14:useLocalDpi xmlns:a14="http://schemas.microsoft.com/office/drawing/2010/main" val="0"/>
               </a:ext>
               <a:ext uri="{96DAC541-7B7A-43D3-8B79-37D633B846F1}">
-                <asvg:svgBlip xmlns:asvg="http://schemas.microsoft.com/office/drawing/2016/SVG/main" r:embed="rId6"/>
+                <asvg:svgBlip xmlns:asvg="http://schemas.microsoft.com/office/drawing/2016/SVG/main" r:embed="rId3"/>
               </a:ext>
             </a:extLst>
           </a:blip>
@@ -10231,7 +11367,7 @@
         </a:prstGeom>
         <a:solidFill>
           <a:schemeClr val="accent2">
-            <a:hueOff val="-9306833"/>
+            <a:hueOff val="-9306832"/>
             <a:satOff val="-4031"/>
             <a:lumOff val="-4117"/>
             <a:alphaOff val="0"/>
@@ -10240,7 +11376,7 @@
         <a:ln w="15875" cap="flat" cmpd="sng" algn="ctr">
           <a:solidFill>
             <a:schemeClr val="accent2">
-              <a:hueOff val="-9306833"/>
+              <a:hueOff val="-9306832"/>
               <a:satOff val="-4031"/>
               <a:lumOff val="-4117"/>
               <a:alphaOff val="0"/>
@@ -10538,7 +11674,7 @@
         </a:prstGeom>
         <a:solidFill>
           <a:schemeClr val="accent2">
-            <a:hueOff val="-18613665"/>
+            <a:hueOff val="-18613663"/>
             <a:satOff val="-8061"/>
             <a:lumOff val="-8235"/>
             <a:alphaOff val="0"/>
@@ -10547,7 +11683,7 @@
         <a:ln w="15875" cap="flat" cmpd="sng" algn="ctr">
           <a:solidFill>
             <a:schemeClr val="accent2">
-              <a:hueOff val="-18613665"/>
+              <a:hueOff val="-18613663"/>
               <a:satOff val="-8061"/>
               <a:lumOff val="-8235"/>
               <a:alphaOff val="0"/>
@@ -12366,6 +13502,338 @@
       <dsp:cNvGrpSpPr/>
     </dsp:nvGrpSpPr>
     <dsp:grpSpPr/>
+    <dsp:sp modelId="{3EF3C996-C09E-E841-B782-D27539B692DD}">
+      <dsp:nvSpPr>
+        <dsp:cNvPr id="0" name=""/>
+        <dsp:cNvSpPr/>
+      </dsp:nvSpPr>
+      <dsp:spPr>
+        <a:xfrm>
+          <a:off x="0" y="95796"/>
+          <a:ext cx="6797675" cy="1312739"/>
+        </a:xfrm>
+        <a:prstGeom prst="roundRect">
+          <a:avLst/>
+        </a:prstGeom>
+        <a:solidFill>
+          <a:schemeClr val="accent2">
+            <a:hueOff val="0"/>
+            <a:satOff val="0"/>
+            <a:lumOff val="0"/>
+            <a:alphaOff val="0"/>
+          </a:schemeClr>
+        </a:solidFill>
+        <a:ln w="15875" cap="flat" cmpd="sng" algn="ctr">
+          <a:solidFill>
+            <a:schemeClr val="lt1">
+              <a:hueOff val="0"/>
+              <a:satOff val="0"/>
+              <a:lumOff val="0"/>
+              <a:alphaOff val="0"/>
+            </a:schemeClr>
+          </a:solidFill>
+          <a:prstDash val="solid"/>
+        </a:ln>
+        <a:effectLst/>
+      </dsp:spPr>
+      <dsp:style>
+        <a:lnRef idx="2">
+          <a:scrgbClr r="0" g="0" b="0"/>
+        </a:lnRef>
+        <a:fillRef idx="1">
+          <a:scrgbClr r="0" g="0" b="0"/>
+        </a:fillRef>
+        <a:effectRef idx="0">
+          <a:scrgbClr r="0" g="0" b="0"/>
+        </a:effectRef>
+        <a:fontRef idx="minor">
+          <a:schemeClr val="lt1"/>
+        </a:fontRef>
+      </dsp:style>
+      <dsp:txBody>
+        <a:bodyPr spcFirstLastPara="0" vert="horz" wrap="square" lIns="91440" tIns="91440" rIns="91440" bIns="91440" numCol="1" spcCol="1270" anchor="ctr" anchorCtr="0">
+          <a:noAutofit/>
+        </a:bodyPr>
+        <a:lstStyle/>
+        <a:p>
+          <a:pPr marL="0" lvl="0" indent="0" algn="l" defTabSz="1066800">
+            <a:lnSpc>
+              <a:spcPct val="90000"/>
+            </a:lnSpc>
+            <a:spcBef>
+              <a:spcPct val="0"/>
+            </a:spcBef>
+            <a:spcAft>
+              <a:spcPct val="35000"/>
+            </a:spcAft>
+            <a:buNone/>
+          </a:pPr>
+          <a:r>
+            <a:rPr lang="es-MX" sz="2400" kern="1200" dirty="0"/>
+            <a:t>Uso de agentes para automatizar tareas de ingesta y preprocesamiento</a:t>
+          </a:r>
+          <a:endParaRPr lang="en-US" sz="2400" kern="1200" dirty="0"/>
+        </a:p>
+      </dsp:txBody>
+      <dsp:txXfrm>
+        <a:off x="64083" y="159879"/>
+        <a:ext cx="6669509" cy="1184573"/>
+      </dsp:txXfrm>
+    </dsp:sp>
+    <dsp:sp modelId="{94B43A2B-6484-0B47-A3AF-2E600FDE189E}">
+      <dsp:nvSpPr>
+        <dsp:cNvPr id="0" name=""/>
+        <dsp:cNvSpPr/>
+      </dsp:nvSpPr>
+      <dsp:spPr>
+        <a:xfrm>
+          <a:off x="0" y="1477656"/>
+          <a:ext cx="6797675" cy="1312739"/>
+        </a:xfrm>
+        <a:prstGeom prst="roundRect">
+          <a:avLst/>
+        </a:prstGeom>
+        <a:solidFill>
+          <a:schemeClr val="accent2">
+            <a:hueOff val="-6204554"/>
+            <a:satOff val="-2687"/>
+            <a:lumOff val="-2745"/>
+            <a:alphaOff val="0"/>
+          </a:schemeClr>
+        </a:solidFill>
+        <a:ln w="15875" cap="flat" cmpd="sng" algn="ctr">
+          <a:solidFill>
+            <a:schemeClr val="lt1">
+              <a:hueOff val="0"/>
+              <a:satOff val="0"/>
+              <a:lumOff val="0"/>
+              <a:alphaOff val="0"/>
+            </a:schemeClr>
+          </a:solidFill>
+          <a:prstDash val="solid"/>
+        </a:ln>
+        <a:effectLst/>
+      </dsp:spPr>
+      <dsp:style>
+        <a:lnRef idx="2">
+          <a:scrgbClr r="0" g="0" b="0"/>
+        </a:lnRef>
+        <a:fillRef idx="1">
+          <a:scrgbClr r="0" g="0" b="0"/>
+        </a:fillRef>
+        <a:effectRef idx="0">
+          <a:scrgbClr r="0" g="0" b="0"/>
+        </a:effectRef>
+        <a:fontRef idx="minor">
+          <a:schemeClr val="lt1"/>
+        </a:fontRef>
+      </dsp:style>
+      <dsp:txBody>
+        <a:bodyPr spcFirstLastPara="0" vert="horz" wrap="square" lIns="91440" tIns="91440" rIns="91440" bIns="91440" numCol="1" spcCol="1270" anchor="ctr" anchorCtr="0">
+          <a:noAutofit/>
+        </a:bodyPr>
+        <a:lstStyle/>
+        <a:p>
+          <a:pPr marL="0" lvl="0" indent="0" algn="l" defTabSz="1066800">
+            <a:lnSpc>
+              <a:spcPct val="90000"/>
+            </a:lnSpc>
+            <a:spcBef>
+              <a:spcPct val="0"/>
+            </a:spcBef>
+            <a:spcAft>
+              <a:spcPct val="35000"/>
+            </a:spcAft>
+            <a:buNone/>
+          </a:pPr>
+          <a:r>
+            <a:rPr lang="es-MX" sz="2400" kern="1200"/>
+            <a:t>Usar las herramientas correctas de la manera correcta, entendiendo lo que se pide</a:t>
+          </a:r>
+          <a:endParaRPr lang="en-US" sz="2400" kern="1200"/>
+        </a:p>
+      </dsp:txBody>
+      <dsp:txXfrm>
+        <a:off x="64083" y="1541739"/>
+        <a:ext cx="6669509" cy="1184573"/>
+      </dsp:txXfrm>
+    </dsp:sp>
+    <dsp:sp modelId="{514E346E-8134-FB46-AB85-CC4866232E5B}">
+      <dsp:nvSpPr>
+        <dsp:cNvPr id="0" name=""/>
+        <dsp:cNvSpPr/>
+      </dsp:nvSpPr>
+      <dsp:spPr>
+        <a:xfrm>
+          <a:off x="0" y="2859516"/>
+          <a:ext cx="6797675" cy="1312739"/>
+        </a:xfrm>
+        <a:prstGeom prst="roundRect">
+          <a:avLst/>
+        </a:prstGeom>
+        <a:solidFill>
+          <a:schemeClr val="accent2">
+            <a:hueOff val="-12409109"/>
+            <a:satOff val="-5374"/>
+            <a:lumOff val="-5490"/>
+            <a:alphaOff val="0"/>
+          </a:schemeClr>
+        </a:solidFill>
+        <a:ln w="15875" cap="flat" cmpd="sng" algn="ctr">
+          <a:solidFill>
+            <a:schemeClr val="lt1">
+              <a:hueOff val="0"/>
+              <a:satOff val="0"/>
+              <a:lumOff val="0"/>
+              <a:alphaOff val="0"/>
+            </a:schemeClr>
+          </a:solidFill>
+          <a:prstDash val="solid"/>
+        </a:ln>
+        <a:effectLst/>
+      </dsp:spPr>
+      <dsp:style>
+        <a:lnRef idx="2">
+          <a:scrgbClr r="0" g="0" b="0"/>
+        </a:lnRef>
+        <a:fillRef idx="1">
+          <a:scrgbClr r="0" g="0" b="0"/>
+        </a:fillRef>
+        <a:effectRef idx="0">
+          <a:scrgbClr r="0" g="0" b="0"/>
+        </a:effectRef>
+        <a:fontRef idx="minor">
+          <a:schemeClr val="lt1"/>
+        </a:fontRef>
+      </dsp:style>
+      <dsp:txBody>
+        <a:bodyPr spcFirstLastPara="0" vert="horz" wrap="square" lIns="91440" tIns="91440" rIns="91440" bIns="91440" numCol="1" spcCol="1270" anchor="ctr" anchorCtr="0">
+          <a:noAutofit/>
+        </a:bodyPr>
+        <a:lstStyle/>
+        <a:p>
+          <a:pPr marL="0" lvl="0" indent="0" algn="l" defTabSz="1066800">
+            <a:lnSpc>
+              <a:spcPct val="90000"/>
+            </a:lnSpc>
+            <a:spcBef>
+              <a:spcPct val="0"/>
+            </a:spcBef>
+            <a:spcAft>
+              <a:spcPct val="35000"/>
+            </a:spcAft>
+            <a:buNone/>
+          </a:pPr>
+          <a:r>
+            <a:rPr lang="es-MX" sz="2400" kern="1200" dirty="0"/>
+            <a:t>Selección y adaptación de </a:t>
+          </a:r>
+          <a:r>
+            <a:rPr lang="es-MX" sz="2400" i="1" kern="1200" dirty="0"/>
+            <a:t>skills</a:t>
+          </a:r>
+          <a:r>
+            <a:rPr lang="es-MX" sz="2400" kern="1200" dirty="0"/>
+            <a:t> para desarrollo agentico</a:t>
+          </a:r>
+          <a:endParaRPr lang="en-US" sz="2400" kern="1200" dirty="0"/>
+        </a:p>
+      </dsp:txBody>
+      <dsp:txXfrm>
+        <a:off x="64083" y="2923599"/>
+        <a:ext cx="6669509" cy="1184573"/>
+      </dsp:txXfrm>
+    </dsp:sp>
+    <dsp:sp modelId="{CEA4657B-98A1-0045-9D4F-834403F9005B}">
+      <dsp:nvSpPr>
+        <dsp:cNvPr id="0" name=""/>
+        <dsp:cNvSpPr/>
+      </dsp:nvSpPr>
+      <dsp:spPr>
+        <a:xfrm>
+          <a:off x="0" y="4241376"/>
+          <a:ext cx="6797675" cy="1312739"/>
+        </a:xfrm>
+        <a:prstGeom prst="roundRect">
+          <a:avLst/>
+        </a:prstGeom>
+        <a:solidFill>
+          <a:schemeClr val="accent2">
+            <a:hueOff val="-18613663"/>
+            <a:satOff val="-8061"/>
+            <a:lumOff val="-8235"/>
+            <a:alphaOff val="0"/>
+          </a:schemeClr>
+        </a:solidFill>
+        <a:ln w="15875" cap="flat" cmpd="sng" algn="ctr">
+          <a:solidFill>
+            <a:schemeClr val="lt1">
+              <a:hueOff val="0"/>
+              <a:satOff val="0"/>
+              <a:lumOff val="0"/>
+              <a:alphaOff val="0"/>
+            </a:schemeClr>
+          </a:solidFill>
+          <a:prstDash val="solid"/>
+        </a:ln>
+        <a:effectLst/>
+      </dsp:spPr>
+      <dsp:style>
+        <a:lnRef idx="2">
+          <a:scrgbClr r="0" g="0" b="0"/>
+        </a:lnRef>
+        <a:fillRef idx="1">
+          <a:scrgbClr r="0" g="0" b="0"/>
+        </a:fillRef>
+        <a:effectRef idx="0">
+          <a:scrgbClr r="0" g="0" b="0"/>
+        </a:effectRef>
+        <a:fontRef idx="minor">
+          <a:schemeClr val="lt1"/>
+        </a:fontRef>
+      </dsp:style>
+      <dsp:txBody>
+        <a:bodyPr spcFirstLastPara="0" vert="horz" wrap="square" lIns="91440" tIns="91440" rIns="91440" bIns="91440" numCol="1" spcCol="1270" anchor="ctr" anchorCtr="0">
+          <a:noAutofit/>
+        </a:bodyPr>
+        <a:lstStyle/>
+        <a:p>
+          <a:pPr marL="0" lvl="0" indent="0" algn="l" defTabSz="1066800">
+            <a:lnSpc>
+              <a:spcPct val="90000"/>
+            </a:lnSpc>
+            <a:spcBef>
+              <a:spcPct val="0"/>
+            </a:spcBef>
+            <a:spcAft>
+              <a:spcPct val="35000"/>
+            </a:spcAft>
+            <a:buNone/>
+          </a:pPr>
+          <a:r>
+            <a:rPr lang="es-MX" sz="2400" kern="1200" dirty="0"/>
+            <a:t>Desarrollo de blogs, tableros e historias de datos apoyads con LLMs, pero de la manera correcta</a:t>
+          </a:r>
+          <a:endParaRPr lang="en-US" sz="2400" kern="1200" dirty="0"/>
+        </a:p>
+      </dsp:txBody>
+      <dsp:txXfrm>
+        <a:off x="64083" y="4305459"/>
+        <a:ext cx="6669509" cy="1184573"/>
+      </dsp:txXfrm>
+    </dsp:sp>
+  </dsp:spTree>
+</dsp:drawing>
+</file>
+
+<file path=ppt/diagrams/drawing8.xml><?xml version="1.0" encoding="utf-8"?>
+<dsp:drawing xmlns:dgm="http://schemas.openxmlformats.org/drawingml/2006/diagram" xmlns:dsp="http://schemas.microsoft.com/office/drawing/2008/diagram" xmlns:a="http://schemas.openxmlformats.org/drawingml/2006/main">
+  <dsp:spTree>
+    <dsp:nvGrpSpPr>
+      <dsp:cNvPr id="0" name=""/>
+      <dsp:cNvGrpSpPr/>
+    </dsp:nvGrpSpPr>
+    <dsp:grpSpPr/>
     <dsp:sp modelId="{374BCFB3-F01A-4A36-BE40-45429F28DE3F}">
       <dsp:nvSpPr>
         <dsp:cNvPr id="0" name=""/>
@@ -12373,8 +13841,8 @@
       </dsp:nvSpPr>
       <dsp:spPr>
         <a:xfrm>
-          <a:off x="0" y="625"/>
-          <a:ext cx="6582555" cy="1463013"/>
+          <a:off x="0" y="2125"/>
+          <a:ext cx="6582555" cy="1077378"/>
         </a:xfrm>
         <a:prstGeom prst="roundRect">
           <a:avLst>
@@ -12414,20 +13882,20 @@
       </dsp:nvSpPr>
       <dsp:spPr>
         <a:xfrm>
-          <a:off x="442561" y="329803"/>
-          <a:ext cx="804657" cy="804657"/>
+          <a:off x="325906" y="244535"/>
+          <a:ext cx="592558" cy="592558"/>
         </a:xfrm>
         <a:prstGeom prst="rect">
           <a:avLst/>
         </a:prstGeom>
         <a:blipFill>
-          <a:blip xmlns:r="http://schemas.openxmlformats.org/officeDocument/2006/relationships" r:embed="rId1">
+          <a:blip xmlns:r="http://schemas.openxmlformats.org/officeDocument/2006/relationships">
             <a:extLst>
               <a:ext uri="{28A0092B-C50C-407E-A947-70E740481C1C}">
                 <a14:useLocalDpi xmlns:a14="http://schemas.microsoft.com/office/drawing/2010/main" val="0"/>
               </a:ext>
               <a:ext uri="{96DAC541-7B7A-43D3-8B79-37D633B846F1}">
-                <asvg:svgBlip xmlns:asvg="http://schemas.microsoft.com/office/drawing/2016/SVG/main" r:embed="rId2"/>
+                <asvg:svgBlip xmlns:asvg="http://schemas.microsoft.com/office/drawing/2016/SVG/main" r:embed="rId1"/>
               </a:ext>
             </a:extLst>
           </a:blip>
@@ -12464,8 +13932,8 @@
       </dsp:nvSpPr>
       <dsp:spPr>
         <a:xfrm>
-          <a:off x="1689780" y="625"/>
-          <a:ext cx="4892774" cy="1463013"/>
+          <a:off x="1244371" y="2125"/>
+          <a:ext cx="5338183" cy="1077378"/>
         </a:xfrm>
         <a:prstGeom prst="rect">
           <a:avLst/>
@@ -12489,12 +13957,12 @@
         <a:fontRef idx="minor"/>
       </dsp:style>
       <dsp:txBody>
-        <a:bodyPr spcFirstLastPara="0" vert="horz" wrap="square" lIns="154836" tIns="154836" rIns="154836" bIns="154836" numCol="1" spcCol="1270" anchor="ctr" anchorCtr="0">
+        <a:bodyPr spcFirstLastPara="0" vert="horz" wrap="square" lIns="114023" tIns="114023" rIns="114023" bIns="114023" numCol="1" spcCol="1270" anchor="ctr" anchorCtr="0">
           <a:noAutofit/>
         </a:bodyPr>
         <a:lstStyle/>
         <a:p>
-          <a:pPr marL="0" lvl="0" indent="0" algn="l" defTabSz="1111250">
+          <a:pPr marL="0" lvl="0" indent="0" algn="l" defTabSz="977900">
             <a:lnSpc>
               <a:spcPct val="100000"/>
             </a:lnSpc>
@@ -12507,15 +13975,15 @@
             <a:buNone/>
           </a:pPr>
           <a:r>
-            <a:rPr lang="es-ES_tradnl" sz="2500" kern="1200" dirty="0"/>
-            <a:t>Comunicación (20%)</a:t>
+            <a:rPr lang="es-ES_tradnl" sz="2200" kern="1200" dirty="0"/>
+            <a:t>Comunicación (10%)</a:t>
           </a:r>
-          <a:endParaRPr lang="en-US" sz="2500" kern="1200" dirty="0"/>
+          <a:endParaRPr lang="en-US" sz="2200" kern="1200" dirty="0"/>
         </a:p>
       </dsp:txBody>
       <dsp:txXfrm>
-        <a:off x="1689780" y="625"/>
-        <a:ext cx="4892774" cy="1463013"/>
+        <a:off x="1244371" y="2125"/>
+        <a:ext cx="5338183" cy="1077378"/>
       </dsp:txXfrm>
     </dsp:sp>
     <dsp:sp modelId="{11F50669-F2B2-4056-9EF7-FB04D23E2162}">
@@ -12525,8 +13993,8 @@
       </dsp:nvSpPr>
       <dsp:spPr>
         <a:xfrm>
-          <a:off x="0" y="1829392"/>
-          <a:ext cx="6582555" cy="1463013"/>
+          <a:off x="0" y="1348848"/>
+          <a:ext cx="6582555" cy="1077378"/>
         </a:xfrm>
         <a:prstGeom prst="roundRect">
           <a:avLst>
@@ -12566,20 +14034,20 @@
       </dsp:nvSpPr>
       <dsp:spPr>
         <a:xfrm>
-          <a:off x="442561" y="2158570"/>
-          <a:ext cx="804657" cy="804657"/>
+          <a:off x="325906" y="1591258"/>
+          <a:ext cx="592558" cy="592558"/>
         </a:xfrm>
         <a:prstGeom prst="rect">
           <a:avLst/>
         </a:prstGeom>
         <a:blipFill>
-          <a:blip xmlns:r="http://schemas.openxmlformats.org/officeDocument/2006/relationships" r:embed="rId3">
+          <a:blip xmlns:r="http://schemas.openxmlformats.org/officeDocument/2006/relationships">
             <a:extLst>
               <a:ext uri="{28A0092B-C50C-407E-A947-70E740481C1C}">
                 <a14:useLocalDpi xmlns:a14="http://schemas.microsoft.com/office/drawing/2010/main" val="0"/>
               </a:ext>
               <a:ext uri="{96DAC541-7B7A-43D3-8B79-37D633B846F1}">
-                <asvg:svgBlip xmlns:asvg="http://schemas.microsoft.com/office/drawing/2016/SVG/main" r:embed="rId4"/>
+                <asvg:svgBlip xmlns:asvg="http://schemas.microsoft.com/office/drawing/2016/SVG/main" r:embed="rId2"/>
               </a:ext>
             </a:extLst>
           </a:blip>
@@ -12615,8 +14083,8 @@
       </dsp:nvSpPr>
       <dsp:spPr>
         <a:xfrm>
-          <a:off x="1689780" y="1829392"/>
-          <a:ext cx="4892774" cy="1463013"/>
+          <a:off x="1244371" y="1348848"/>
+          <a:ext cx="5338183" cy="1077378"/>
         </a:xfrm>
         <a:prstGeom prst="rect">
           <a:avLst/>
@@ -12640,12 +14108,12 @@
         <a:fontRef idx="minor"/>
       </dsp:style>
       <dsp:txBody>
-        <a:bodyPr spcFirstLastPara="0" vert="horz" wrap="square" lIns="154836" tIns="154836" rIns="154836" bIns="154836" numCol="1" spcCol="1270" anchor="ctr" anchorCtr="0">
+        <a:bodyPr spcFirstLastPara="0" vert="horz" wrap="square" lIns="114023" tIns="114023" rIns="114023" bIns="114023" numCol="1" spcCol="1270" anchor="ctr" anchorCtr="0">
           <a:noAutofit/>
         </a:bodyPr>
         <a:lstStyle/>
         <a:p>
-          <a:pPr marL="0" lvl="0" indent="0" algn="l" defTabSz="1111250">
+          <a:pPr marL="0" lvl="0" indent="0" algn="l" defTabSz="977900">
             <a:lnSpc>
               <a:spcPct val="100000"/>
             </a:lnSpc>
@@ -12658,15 +14126,15 @@
             <a:buNone/>
           </a:pPr>
           <a:r>
-            <a:rPr lang="es-ES_tradnl" sz="2500" kern="1200" dirty="0"/>
+            <a:rPr lang="es-ES_tradnl" sz="2200" kern="1200" dirty="0"/>
             <a:t>Evidencias de aprendizaje (40%)</a:t>
           </a:r>
-          <a:endParaRPr lang="en-US" sz="2500" kern="1200" dirty="0"/>
+          <a:endParaRPr lang="en-US" sz="2200" kern="1200" dirty="0"/>
         </a:p>
       </dsp:txBody>
       <dsp:txXfrm>
-        <a:off x="1689780" y="1829392"/>
-        <a:ext cx="4892774" cy="1463013"/>
+        <a:off x="1244371" y="1348848"/>
+        <a:ext cx="5338183" cy="1077378"/>
       </dsp:txXfrm>
     </dsp:sp>
     <dsp:sp modelId="{446856D0-AFA5-411F-861E-D914B23267E8}">
@@ -12676,8 +14144,8 @@
       </dsp:nvSpPr>
       <dsp:spPr>
         <a:xfrm>
-          <a:off x="0" y="3658159"/>
-          <a:ext cx="6582555" cy="1463013"/>
+          <a:off x="0" y="2695571"/>
+          <a:ext cx="6582555" cy="1077378"/>
         </a:xfrm>
         <a:prstGeom prst="roundRect">
           <a:avLst>
@@ -12717,17 +14185,17 @@
       </dsp:nvSpPr>
       <dsp:spPr>
         <a:xfrm>
-          <a:off x="442561" y="3987337"/>
-          <a:ext cx="804657" cy="804657"/>
+          <a:off x="325906" y="2937981"/>
+          <a:ext cx="592558" cy="592558"/>
         </a:xfrm>
         <a:prstGeom prst="rect">
           <a:avLst/>
         </a:prstGeom>
         <a:blipFill>
-          <a:blip xmlns:r="http://schemas.openxmlformats.org/officeDocument/2006/relationships" r:embed="rId5">
+          <a:blip xmlns:r="http://schemas.openxmlformats.org/officeDocument/2006/relationships">
             <a:extLst>
               <a:ext uri="{96DAC541-7B7A-43D3-8B79-37D633B846F1}">
-                <asvg:svgBlip xmlns:asvg="http://schemas.microsoft.com/office/drawing/2016/SVG/main" r:embed="rId6"/>
+                <asvg:svgBlip xmlns:asvg="http://schemas.microsoft.com/office/drawing/2016/SVG/main" r:embed="rId3"/>
               </a:ext>
             </a:extLst>
           </a:blip>
@@ -12764,8 +14232,8 @@
       </dsp:nvSpPr>
       <dsp:spPr>
         <a:xfrm>
-          <a:off x="1689780" y="3658159"/>
-          <a:ext cx="4892774" cy="1463013"/>
+          <a:off x="1244371" y="2695571"/>
+          <a:ext cx="5338183" cy="1077378"/>
         </a:xfrm>
         <a:prstGeom prst="rect">
           <a:avLst/>
@@ -12789,12 +14257,12 @@
         <a:fontRef idx="minor"/>
       </dsp:style>
       <dsp:txBody>
-        <a:bodyPr spcFirstLastPara="0" vert="horz" wrap="square" lIns="154836" tIns="154836" rIns="154836" bIns="154836" numCol="1" spcCol="1270" anchor="ctr" anchorCtr="0">
+        <a:bodyPr spcFirstLastPara="0" vert="horz" wrap="square" lIns="114023" tIns="114023" rIns="114023" bIns="114023" numCol="1" spcCol="1270" anchor="ctr" anchorCtr="0">
           <a:noAutofit/>
         </a:bodyPr>
         <a:lstStyle/>
         <a:p>
-          <a:pPr marL="0" lvl="0" indent="0" algn="l" defTabSz="1111250">
+          <a:pPr marL="0" lvl="0" indent="0" algn="l" defTabSz="977900">
             <a:lnSpc>
               <a:spcPct val="100000"/>
             </a:lnSpc>
@@ -12807,15 +14275,171 @@
             <a:buNone/>
           </a:pPr>
           <a:r>
-            <a:rPr lang="es-ES_tradnl" sz="2500" kern="1200" dirty="0"/>
+            <a:rPr lang="es-ES_tradnl" sz="2200" kern="1200" dirty="0"/>
             <a:t>Proyectos (40%)</a:t>
           </a:r>
-          <a:endParaRPr lang="en-US" sz="2500" kern="1200" dirty="0"/>
+          <a:endParaRPr lang="en-US" sz="2200" kern="1200" dirty="0"/>
         </a:p>
       </dsp:txBody>
       <dsp:txXfrm>
-        <a:off x="1689780" y="3658159"/>
-        <a:ext cx="4892774" cy="1463013"/>
+        <a:off x="1244371" y="2695571"/>
+        <a:ext cx="5338183" cy="1077378"/>
+      </dsp:txXfrm>
+    </dsp:sp>
+    <dsp:sp modelId="{E86AB438-2BEF-3E4C-9E92-DB9AF34E5D17}">
+      <dsp:nvSpPr>
+        <dsp:cNvPr id="0" name=""/>
+        <dsp:cNvSpPr/>
+      </dsp:nvSpPr>
+      <dsp:spPr>
+        <a:xfrm>
+          <a:off x="0" y="4042294"/>
+          <a:ext cx="6582555" cy="1077378"/>
+        </a:xfrm>
+        <a:prstGeom prst="roundRect">
+          <a:avLst>
+            <a:gd name="adj" fmla="val 10000"/>
+          </a:avLst>
+        </a:prstGeom>
+        <a:solidFill>
+          <a:schemeClr val="accent5">
+            <a:hueOff val="0"/>
+            <a:satOff val="0"/>
+            <a:lumOff val="0"/>
+            <a:alphaOff val="0"/>
+          </a:schemeClr>
+        </a:solidFill>
+        <a:ln>
+          <a:noFill/>
+        </a:ln>
+        <a:effectLst/>
+      </dsp:spPr>
+      <dsp:style>
+        <a:lnRef idx="0">
+          <a:scrgbClr r="0" g="0" b="0"/>
+        </a:lnRef>
+        <a:fillRef idx="1">
+          <a:scrgbClr r="0" g="0" b="0"/>
+        </a:fillRef>
+        <a:effectRef idx="0">
+          <a:scrgbClr r="0" g="0" b="0"/>
+        </a:effectRef>
+        <a:fontRef idx="minor"/>
+      </dsp:style>
+    </dsp:sp>
+    <dsp:sp modelId="{4B7675ED-2664-9A48-B335-82727094FEC6}">
+      <dsp:nvSpPr>
+        <dsp:cNvPr id="0" name=""/>
+        <dsp:cNvSpPr/>
+      </dsp:nvSpPr>
+      <dsp:spPr>
+        <a:xfrm>
+          <a:off x="325906" y="4284704"/>
+          <a:ext cx="592558" cy="592558"/>
+        </a:xfrm>
+        <a:prstGeom prst="rect">
+          <a:avLst/>
+        </a:prstGeom>
+        <a:blipFill>
+          <a:blip xmlns:r="http://schemas.openxmlformats.org/officeDocument/2006/relationships">
+            <a:extLst>
+              <a:ext uri="{96DAC541-7B7A-43D3-8B79-37D633B846F1}">
+                <asvg:svgBlip xmlns:asvg="http://schemas.microsoft.com/office/drawing/2016/SVG/main" r:embed="rId4"/>
+              </a:ext>
+            </a:extLst>
+          </a:blip>
+          <a:srcRect/>
+          <a:stretch>
+            <a:fillRect/>
+          </a:stretch>
+        </a:blipFill>
+        <a:ln w="15875" cap="flat" cmpd="sng" algn="ctr">
+          <a:solidFill>
+            <a:schemeClr val="lt1">
+              <a:alpha val="0"/>
+              <a:hueOff val="0"/>
+              <a:satOff val="0"/>
+              <a:lumOff val="0"/>
+              <a:alphaOff val="0"/>
+            </a:schemeClr>
+          </a:solidFill>
+          <a:prstDash val="solid"/>
+        </a:ln>
+        <a:effectLst/>
+      </dsp:spPr>
+      <dsp:style>
+        <a:lnRef idx="2">
+          <a:scrgbClr r="0" g="0" b="0"/>
+        </a:lnRef>
+        <a:fillRef idx="1">
+          <a:scrgbClr r="0" g="0" b="0"/>
+        </a:fillRef>
+        <a:effectRef idx="0">
+          <a:scrgbClr r="0" g="0" b="0"/>
+        </a:effectRef>
+        <a:fontRef idx="minor">
+          <a:schemeClr val="lt1"/>
+        </a:fontRef>
+      </dsp:style>
+    </dsp:sp>
+    <dsp:sp modelId="{08432978-B3CD-3046-BE7B-4B9418BA455C}">
+      <dsp:nvSpPr>
+        <dsp:cNvPr id="0" name=""/>
+        <dsp:cNvSpPr/>
+      </dsp:nvSpPr>
+      <dsp:spPr>
+        <a:xfrm>
+          <a:off x="1244371" y="4042294"/>
+          <a:ext cx="5338183" cy="1077378"/>
+        </a:xfrm>
+        <a:prstGeom prst="rect">
+          <a:avLst/>
+        </a:prstGeom>
+        <a:noFill/>
+        <a:ln>
+          <a:noFill/>
+        </a:ln>
+        <a:effectLst/>
+      </dsp:spPr>
+      <dsp:style>
+        <a:lnRef idx="0">
+          <a:scrgbClr r="0" g="0" b="0"/>
+        </a:lnRef>
+        <a:fillRef idx="0">
+          <a:scrgbClr r="0" g="0" b="0"/>
+        </a:fillRef>
+        <a:effectRef idx="0">
+          <a:scrgbClr r="0" g="0" b="0"/>
+        </a:effectRef>
+        <a:fontRef idx="minor"/>
+      </dsp:style>
+      <dsp:txBody>
+        <a:bodyPr spcFirstLastPara="0" vert="horz" wrap="square" lIns="114023" tIns="114023" rIns="114023" bIns="114023" numCol="1" spcCol="1270" anchor="ctr" anchorCtr="0">
+          <a:noAutofit/>
+        </a:bodyPr>
+        <a:lstStyle/>
+        <a:p>
+          <a:pPr marL="0" lvl="0" indent="0" algn="l" defTabSz="977900">
+            <a:lnSpc>
+              <a:spcPct val="100000"/>
+            </a:lnSpc>
+            <a:spcBef>
+              <a:spcPct val="0"/>
+            </a:spcBef>
+            <a:spcAft>
+              <a:spcPct val="35000"/>
+            </a:spcAft>
+            <a:buNone/>
+          </a:pPr>
+          <a:r>
+            <a:rPr lang="es-MX" sz="2200" kern="1200" dirty="0"/>
+            <a:t>Actividades complementarias (10%)</a:t>
+          </a:r>
+        </a:p>
+      </dsp:txBody>
+      <dsp:txXfrm>
+        <a:off x="1244371" y="4042294"/>
+        <a:ext cx="5338183" cy="1077378"/>
       </dsp:txXfrm>
     </dsp:sp>
   </dsp:spTree>
@@ -14767,6 +16391,173 @@
 </file>
 
 <file path=ppt/diagrams/layout7.xml><?xml version="1.0" encoding="utf-8"?>
+<dgm:layoutDef xmlns:dgm="http://schemas.openxmlformats.org/drawingml/2006/diagram" xmlns:a="http://schemas.openxmlformats.org/drawingml/2006/main" uniqueId="urn:microsoft.com/office/officeart/2005/8/layout/vList2">
+  <dgm:title val=""/>
+  <dgm:desc val=""/>
+  <dgm:catLst>
+    <dgm:cat type="list" pri="3000"/>
+    <dgm:cat type="convert" pri="1000"/>
+  </dgm:catLst>
+  <dgm:sampData>
+    <dgm:dataModel>
+      <dgm:ptLst>
+        <dgm:pt modelId="0" type="doc"/>
+        <dgm:pt modelId="1">
+          <dgm:prSet phldr="1"/>
+        </dgm:pt>
+        <dgm:pt modelId="11">
+          <dgm:prSet phldr="1"/>
+        </dgm:pt>
+        <dgm:pt modelId="2">
+          <dgm:prSet phldr="1"/>
+        </dgm:pt>
+        <dgm:pt modelId="21">
+          <dgm:prSet phldr="1"/>
+        </dgm:pt>
+      </dgm:ptLst>
+      <dgm:cxnLst>
+        <dgm:cxn modelId="4" srcId="0" destId="1" srcOrd="0" destOrd="0"/>
+        <dgm:cxn modelId="5" srcId="0" destId="2" srcOrd="1" destOrd="0"/>
+        <dgm:cxn modelId="12" srcId="1" destId="11" srcOrd="0" destOrd="0"/>
+        <dgm:cxn modelId="23" srcId="2" destId="21" srcOrd="0" destOrd="0"/>
+      </dgm:cxnLst>
+      <dgm:bg/>
+      <dgm:whole/>
+    </dgm:dataModel>
+  </dgm:sampData>
+  <dgm:styleData>
+    <dgm:dataModel>
+      <dgm:ptLst>
+        <dgm:pt modelId="0" type="doc"/>
+        <dgm:pt modelId="1"/>
+        <dgm:pt modelId="2"/>
+      </dgm:ptLst>
+      <dgm:cxnLst>
+        <dgm:cxn modelId="3" srcId="0" destId="1" srcOrd="0" destOrd="0"/>
+        <dgm:cxn modelId="4" srcId="0" destId="2" srcOrd="1" destOrd="0"/>
+      </dgm:cxnLst>
+      <dgm:bg/>
+      <dgm:whole/>
+    </dgm:dataModel>
+  </dgm:styleData>
+  <dgm:clrData>
+    <dgm:dataModel>
+      <dgm:ptLst>
+        <dgm:pt modelId="0" type="doc"/>
+        <dgm:pt modelId="1"/>
+        <dgm:pt modelId="2"/>
+        <dgm:pt modelId="3"/>
+        <dgm:pt modelId="4"/>
+      </dgm:ptLst>
+      <dgm:cxnLst>
+        <dgm:cxn modelId="5" srcId="0" destId="1" srcOrd="0" destOrd="0"/>
+        <dgm:cxn modelId="6" srcId="0" destId="2" srcOrd="1" destOrd="0"/>
+        <dgm:cxn modelId="7" srcId="0" destId="3" srcOrd="2" destOrd="0"/>
+        <dgm:cxn modelId="8" srcId="0" destId="4" srcOrd="3" destOrd="0"/>
+      </dgm:cxnLst>
+      <dgm:bg/>
+      <dgm:whole/>
+    </dgm:dataModel>
+  </dgm:clrData>
+  <dgm:layoutNode name="linear">
+    <dgm:varLst>
+      <dgm:animLvl val="lvl"/>
+      <dgm:resizeHandles val="exact"/>
+    </dgm:varLst>
+    <dgm:alg type="lin">
+      <dgm:param type="linDir" val="fromT"/>
+      <dgm:param type="vertAlign" val="mid"/>
+    </dgm:alg>
+    <dgm:shape xmlns:r="http://schemas.openxmlformats.org/officeDocument/2006/relationships" r:blip="">
+      <dgm:adjLst/>
+    </dgm:shape>
+    <dgm:presOf/>
+    <dgm:constrLst>
+      <dgm:constr type="w" for="ch" forName="parentText" refType="w"/>
+      <dgm:constr type="h" for="ch" forName="parentText" refType="primFontSz" refFor="ch" refForName="parentText" fact="0.52"/>
+      <dgm:constr type="w" for="ch" forName="childText" refType="w"/>
+      <dgm:constr type="h" for="ch" forName="childText" refType="primFontSz" refFor="ch" refForName="parentText" fact="0.46"/>
+      <dgm:constr type="h" for="ch" forName="parentText" op="equ"/>
+      <dgm:constr type="primFontSz" for="ch" forName="parentText" op="equ" val="65"/>
+      <dgm:constr type="primFontSz" for="ch" forName="childText" refType="primFontSz" refFor="ch" refForName="parentText" op="equ"/>
+      <dgm:constr type="h" for="ch" forName="spacer" refType="primFontSz" refFor="ch" refForName="parentText" fact="0.08"/>
+    </dgm:constrLst>
+    <dgm:ruleLst>
+      <dgm:rule type="primFontSz" for="ch" forName="parentText" val="5" fact="NaN" max="NaN"/>
+    </dgm:ruleLst>
+    <dgm:forEach name="Name0" axis="ch" ptType="node">
+      <dgm:layoutNode name="parentText" styleLbl="node1">
+        <dgm:varLst>
+          <dgm:chMax val="0"/>
+          <dgm:bulletEnabled val="1"/>
+        </dgm:varLst>
+        <dgm:alg type="tx">
+          <dgm:param type="parTxLTRAlign" val="l"/>
+          <dgm:param type="parTxRTLAlign" val="r"/>
+        </dgm:alg>
+        <dgm:shape xmlns:r="http://schemas.openxmlformats.org/officeDocument/2006/relationships" type="roundRect" r:blip="">
+          <dgm:adjLst/>
+        </dgm:shape>
+        <dgm:presOf axis="self"/>
+        <dgm:constrLst>
+          <dgm:constr type="tMarg" refType="primFontSz" fact="0.3"/>
+          <dgm:constr type="bMarg" refType="primFontSz" fact="0.3"/>
+          <dgm:constr type="lMarg" refType="primFontSz" fact="0.3"/>
+          <dgm:constr type="rMarg" refType="primFontSz" fact="0.3"/>
+        </dgm:constrLst>
+        <dgm:ruleLst>
+          <dgm:rule type="h" val="INF" fact="NaN" max="NaN"/>
+        </dgm:ruleLst>
+      </dgm:layoutNode>
+      <dgm:choose name="Name1">
+        <dgm:if name="Name2" axis="ch" ptType="node" func="cnt" op="gte" val="1">
+          <dgm:layoutNode name="childText" styleLbl="revTx">
+            <dgm:varLst>
+              <dgm:bulletEnabled val="1"/>
+            </dgm:varLst>
+            <dgm:alg type="tx">
+              <dgm:param type="stBulletLvl" val="1"/>
+              <dgm:param type="lnSpAfChP" val="20"/>
+            </dgm:alg>
+            <dgm:shape xmlns:r="http://schemas.openxmlformats.org/officeDocument/2006/relationships" type="rect" r:blip="">
+              <dgm:adjLst/>
+            </dgm:shape>
+            <dgm:presOf axis="des" ptType="node"/>
+            <dgm:constrLst>
+              <dgm:constr type="tMarg" refType="primFontSz" fact="0.1"/>
+              <dgm:constr type="bMarg" refType="primFontSz" fact="0.1"/>
+              <dgm:constr type="lMarg" refType="w" fact="0.09"/>
+            </dgm:constrLst>
+            <dgm:ruleLst>
+              <dgm:rule type="h" val="INF" fact="NaN" max="NaN"/>
+            </dgm:ruleLst>
+          </dgm:layoutNode>
+        </dgm:if>
+        <dgm:else name="Name3">
+          <dgm:choose name="Name4">
+            <dgm:if name="Name5" axis="par ch" ptType="doc node" func="cnt" op="gte" val="2">
+              <dgm:forEach name="Name6" axis="followSib" ptType="sibTrans" cnt="1">
+                <dgm:layoutNode name="spacer">
+                  <dgm:alg type="sp"/>
+                  <dgm:shape xmlns:r="http://schemas.openxmlformats.org/officeDocument/2006/relationships" r:blip="">
+                    <dgm:adjLst/>
+                  </dgm:shape>
+                  <dgm:presOf/>
+                  <dgm:constrLst/>
+                  <dgm:ruleLst/>
+                </dgm:layoutNode>
+              </dgm:forEach>
+            </dgm:if>
+            <dgm:else name="Name7"/>
+          </dgm:choose>
+        </dgm:else>
+      </dgm:choose>
+    </dgm:forEach>
+  </dgm:layoutNode>
+</dgm:layoutDef>
+</file>
+
+<file path=ppt/diagrams/layout8.xml><?xml version="1.0" encoding="utf-8"?>
 <dgm:layoutDef xmlns:dgm="http://schemas.openxmlformats.org/drawingml/2006/diagram" xmlns:a="http://schemas.openxmlformats.org/drawingml/2006/main" uniqueId="urn:microsoft.com/office/officeart/2018/2/layout/IconVerticalSolidList">
   <dgm:title val="Icon Vertical Solid List"/>
   <dgm:desc val="Use to show a series of visuals from top to bottom with Level 1 or Level 1 and Level 2 text grouped in a shape. Works best with icons or small pictures with lengthier descriptions."/>
@@ -22298,6 +24089,1040 @@
 </dgm:styleDef>
 </file>
 
+<file path=ppt/diagrams/quickStyle8.xml><?xml version="1.0" encoding="utf-8"?>
+<dgm:styleDef xmlns:dgm="http://schemas.openxmlformats.org/drawingml/2006/diagram" xmlns:a="http://schemas.openxmlformats.org/drawingml/2006/main" uniqueId="urn:microsoft.com/office/officeart/2005/8/quickstyle/simple1">
+  <dgm:title val=""/>
+  <dgm:desc val=""/>
+  <dgm:catLst>
+    <dgm:cat type="simple" pri="10100"/>
+  </dgm:catLst>
+  <dgm:scene3d>
+    <a:camera prst="orthographicFront"/>
+    <a:lightRig rig="threePt" dir="t"/>
+  </dgm:scene3d>
+  <dgm:styleLbl name="node0">
+    <dgm:scene3d>
+      <a:camera prst="orthographicFront"/>
+      <a:lightRig rig="threePt" dir="t"/>
+    </dgm:scene3d>
+    <dgm:sp3d/>
+    <dgm:txPr/>
+    <dgm:style>
+      <a:lnRef idx="2">
+        <a:scrgbClr r="0" g="0" b="0"/>
+      </a:lnRef>
+      <a:fillRef idx="1">
+        <a:scrgbClr r="0" g="0" b="0"/>
+      </a:fillRef>
+      <a:effectRef idx="0">
+        <a:scrgbClr r="0" g="0" b="0"/>
+      </a:effectRef>
+      <a:fontRef idx="minor">
+        <a:schemeClr val="lt1"/>
+      </a:fontRef>
+    </dgm:style>
+  </dgm:styleLbl>
+  <dgm:styleLbl name="lnNode1">
+    <dgm:scene3d>
+      <a:camera prst="orthographicFront"/>
+      <a:lightRig rig="threePt" dir="t"/>
+    </dgm:scene3d>
+    <dgm:sp3d/>
+    <dgm:txPr/>
+    <dgm:style>
+      <a:lnRef idx="2">
+        <a:scrgbClr r="0" g="0" b="0"/>
+      </a:lnRef>
+      <a:fillRef idx="1">
+        <a:scrgbClr r="0" g="0" b="0"/>
+      </a:fillRef>
+      <a:effectRef idx="0">
+        <a:scrgbClr r="0" g="0" b="0"/>
+      </a:effectRef>
+      <a:fontRef idx="minor">
+        <a:schemeClr val="lt1"/>
+      </a:fontRef>
+    </dgm:style>
+  </dgm:styleLbl>
+  <dgm:styleLbl name="vennNode1">
+    <dgm:scene3d>
+      <a:camera prst="orthographicFront"/>
+      <a:lightRig rig="threePt" dir="t"/>
+    </dgm:scene3d>
+    <dgm:sp3d/>
+    <dgm:txPr/>
+    <dgm:style>
+      <a:lnRef idx="2">
+        <a:scrgbClr r="0" g="0" b="0"/>
+      </a:lnRef>
+      <a:fillRef idx="1">
+        <a:scrgbClr r="0" g="0" b="0"/>
+      </a:fillRef>
+      <a:effectRef idx="0">
+        <a:scrgbClr r="0" g="0" b="0"/>
+      </a:effectRef>
+      <a:fontRef idx="minor">
+        <a:schemeClr val="tx1"/>
+      </a:fontRef>
+    </dgm:style>
+  </dgm:styleLbl>
+  <dgm:styleLbl name="alignNode1">
+    <dgm:scene3d>
+      <a:camera prst="orthographicFront"/>
+      <a:lightRig rig="threePt" dir="t"/>
+    </dgm:scene3d>
+    <dgm:sp3d/>
+    <dgm:txPr/>
+    <dgm:style>
+      <a:lnRef idx="2">
+        <a:scrgbClr r="0" g="0" b="0"/>
+      </a:lnRef>
+      <a:fillRef idx="1">
+        <a:scrgbClr r="0" g="0" b="0"/>
+      </a:fillRef>
+      <a:effectRef idx="0">
+        <a:scrgbClr r="0" g="0" b="0"/>
+      </a:effectRef>
+      <a:fontRef idx="minor">
+        <a:schemeClr val="lt1"/>
+      </a:fontRef>
+    </dgm:style>
+  </dgm:styleLbl>
+  <dgm:styleLbl name="node1">
+    <dgm:scene3d>
+      <a:camera prst="orthographicFront"/>
+      <a:lightRig rig="threePt" dir="t"/>
+    </dgm:scene3d>
+    <dgm:sp3d/>
+    <dgm:txPr/>
+    <dgm:style>
+      <a:lnRef idx="2">
+        <a:scrgbClr r="0" g="0" b="0"/>
+      </a:lnRef>
+      <a:fillRef idx="1">
+        <a:scrgbClr r="0" g="0" b="0"/>
+      </a:fillRef>
+      <a:effectRef idx="0">
+        <a:scrgbClr r="0" g="0" b="0"/>
+      </a:effectRef>
+      <a:fontRef idx="minor">
+        <a:schemeClr val="lt1"/>
+      </a:fontRef>
+    </dgm:style>
+  </dgm:styleLbl>
+  <dgm:styleLbl name="node2">
+    <dgm:scene3d>
+      <a:camera prst="orthographicFront"/>
+      <a:lightRig rig="threePt" dir="t"/>
+    </dgm:scene3d>
+    <dgm:sp3d/>
+    <dgm:txPr/>
+    <dgm:style>
+      <a:lnRef idx="2">
+        <a:scrgbClr r="0" g="0" b="0"/>
+      </a:lnRef>
+      <a:fillRef idx="1">
+        <a:scrgbClr r="0" g="0" b="0"/>
+      </a:fillRef>
+      <a:effectRef idx="0">
+        <a:scrgbClr r="0" g="0" b="0"/>
+      </a:effectRef>
+      <a:fontRef idx="minor">
+        <a:schemeClr val="lt1"/>
+      </a:fontRef>
+    </dgm:style>
+  </dgm:styleLbl>
+  <dgm:styleLbl name="node3">
+    <dgm:scene3d>
+      <a:camera prst="orthographicFront"/>
+      <a:lightRig rig="threePt" dir="t"/>
+    </dgm:scene3d>
+    <dgm:sp3d/>
+    <dgm:txPr/>
+    <dgm:style>
+      <a:lnRef idx="2">
+        <a:scrgbClr r="0" g="0" b="0"/>
+      </a:lnRef>
+      <a:fillRef idx="1">
+        <a:scrgbClr r="0" g="0" b="0"/>
+      </a:fillRef>
+      <a:effectRef idx="0">
+        <a:scrgbClr r="0" g="0" b="0"/>
+      </a:effectRef>
+      <a:fontRef idx="minor">
+        <a:schemeClr val="lt1"/>
+      </a:fontRef>
+    </dgm:style>
+  </dgm:styleLbl>
+  <dgm:styleLbl name="node4">
+    <dgm:scene3d>
+      <a:camera prst="orthographicFront"/>
+      <a:lightRig rig="threePt" dir="t"/>
+    </dgm:scene3d>
+    <dgm:sp3d/>
+    <dgm:txPr/>
+    <dgm:style>
+      <a:lnRef idx="2">
+        <a:scrgbClr r="0" g="0" b="0"/>
+      </a:lnRef>
+      <a:fillRef idx="1">
+        <a:scrgbClr r="0" g="0" b="0"/>
+      </a:fillRef>
+      <a:effectRef idx="0">
+        <a:scrgbClr r="0" g="0" b="0"/>
+      </a:effectRef>
+      <a:fontRef idx="minor">
+        <a:schemeClr val="lt1"/>
+      </a:fontRef>
+    </dgm:style>
+  </dgm:styleLbl>
+  <dgm:styleLbl name="fgImgPlace1">
+    <dgm:scene3d>
+      <a:camera prst="orthographicFront"/>
+      <a:lightRig rig="threePt" dir="t"/>
+    </dgm:scene3d>
+    <dgm:sp3d/>
+    <dgm:txPr/>
+    <dgm:style>
+      <a:lnRef idx="2">
+        <a:scrgbClr r="0" g="0" b="0"/>
+      </a:lnRef>
+      <a:fillRef idx="1">
+        <a:scrgbClr r="0" g="0" b="0"/>
+      </a:fillRef>
+      <a:effectRef idx="0">
+        <a:scrgbClr r="0" g="0" b="0"/>
+      </a:effectRef>
+      <a:fontRef idx="minor"/>
+    </dgm:style>
+  </dgm:styleLbl>
+  <dgm:styleLbl name="alignImgPlace1">
+    <dgm:scene3d>
+      <a:camera prst="orthographicFront"/>
+      <a:lightRig rig="threePt" dir="t"/>
+    </dgm:scene3d>
+    <dgm:sp3d/>
+    <dgm:txPr/>
+    <dgm:style>
+      <a:lnRef idx="2">
+        <a:scrgbClr r="0" g="0" b="0"/>
+      </a:lnRef>
+      <a:fillRef idx="1">
+        <a:scrgbClr r="0" g="0" b="0"/>
+      </a:fillRef>
+      <a:effectRef idx="0">
+        <a:scrgbClr r="0" g="0" b="0"/>
+      </a:effectRef>
+      <a:fontRef idx="minor"/>
+    </dgm:style>
+  </dgm:styleLbl>
+  <dgm:styleLbl name="bgImgPlace1">
+    <dgm:scene3d>
+      <a:camera prst="orthographicFront"/>
+      <a:lightRig rig="threePt" dir="t"/>
+    </dgm:scene3d>
+    <dgm:sp3d/>
+    <dgm:txPr/>
+    <dgm:style>
+      <a:lnRef idx="2">
+        <a:scrgbClr r="0" g="0" b="0"/>
+      </a:lnRef>
+      <a:fillRef idx="1">
+        <a:scrgbClr r="0" g="0" b="0"/>
+      </a:fillRef>
+      <a:effectRef idx="0">
+        <a:scrgbClr r="0" g="0" b="0"/>
+      </a:effectRef>
+      <a:fontRef idx="minor"/>
+    </dgm:style>
+  </dgm:styleLbl>
+  <dgm:styleLbl name="sibTrans2D1">
+    <dgm:scene3d>
+      <a:camera prst="orthographicFront"/>
+      <a:lightRig rig="threePt" dir="t"/>
+    </dgm:scene3d>
+    <dgm:sp3d/>
+    <dgm:txPr/>
+    <dgm:style>
+      <a:lnRef idx="0">
+        <a:scrgbClr r="0" g="0" b="0"/>
+      </a:lnRef>
+      <a:fillRef idx="1">
+        <a:scrgbClr r="0" g="0" b="0"/>
+      </a:fillRef>
+      <a:effectRef idx="0">
+        <a:scrgbClr r="0" g="0" b="0"/>
+      </a:effectRef>
+      <a:fontRef idx="minor">
+        <a:schemeClr val="lt1"/>
+      </a:fontRef>
+    </dgm:style>
+  </dgm:styleLbl>
+  <dgm:styleLbl name="fgSibTrans2D1">
+    <dgm:scene3d>
+      <a:camera prst="orthographicFront"/>
+      <a:lightRig rig="threePt" dir="t"/>
+    </dgm:scene3d>
+    <dgm:sp3d/>
+    <dgm:txPr/>
+    <dgm:style>
+      <a:lnRef idx="0">
+        <a:scrgbClr r="0" g="0" b="0"/>
+      </a:lnRef>
+      <a:fillRef idx="1">
+        <a:scrgbClr r="0" g="0" b="0"/>
+      </a:fillRef>
+      <a:effectRef idx="0">
+        <a:scrgbClr r="0" g="0" b="0"/>
+      </a:effectRef>
+      <a:fontRef idx="minor">
+        <a:schemeClr val="lt1"/>
+      </a:fontRef>
+    </dgm:style>
+  </dgm:styleLbl>
+  <dgm:styleLbl name="bgSibTrans2D1">
+    <dgm:scene3d>
+      <a:camera prst="orthographicFront"/>
+      <a:lightRig rig="threePt" dir="t"/>
+    </dgm:scene3d>
+    <dgm:sp3d/>
+    <dgm:txPr/>
+    <dgm:style>
+      <a:lnRef idx="0">
+        <a:scrgbClr r="0" g="0" b="0"/>
+      </a:lnRef>
+      <a:fillRef idx="1">
+        <a:scrgbClr r="0" g="0" b="0"/>
+      </a:fillRef>
+      <a:effectRef idx="0">
+        <a:scrgbClr r="0" g="0" b="0"/>
+      </a:effectRef>
+      <a:fontRef idx="minor">
+        <a:schemeClr val="lt1"/>
+      </a:fontRef>
+    </dgm:style>
+  </dgm:styleLbl>
+  <dgm:styleLbl name="sibTrans1D1">
+    <dgm:scene3d>
+      <a:camera prst="orthographicFront"/>
+      <a:lightRig rig="threePt" dir="t"/>
+    </dgm:scene3d>
+    <dgm:sp3d/>
+    <dgm:txPr/>
+    <dgm:style>
+      <a:lnRef idx="1">
+        <a:scrgbClr r="0" g="0" b="0"/>
+      </a:lnRef>
+      <a:fillRef idx="0">
+        <a:scrgbClr r="0" g="0" b="0"/>
+      </a:fillRef>
+      <a:effectRef idx="0">
+        <a:scrgbClr r="0" g="0" b="0"/>
+      </a:effectRef>
+      <a:fontRef idx="minor"/>
+    </dgm:style>
+  </dgm:styleLbl>
+  <dgm:styleLbl name="callout">
+    <dgm:scene3d>
+      <a:camera prst="orthographicFront"/>
+      <a:lightRig rig="threePt" dir="t"/>
+    </dgm:scene3d>
+    <dgm:sp3d/>
+    <dgm:txPr/>
+    <dgm:style>
+      <a:lnRef idx="2">
+        <a:scrgbClr r="0" g="0" b="0"/>
+      </a:lnRef>
+      <a:fillRef idx="1">
+        <a:scrgbClr r="0" g="0" b="0"/>
+      </a:fillRef>
+      <a:effectRef idx="0">
+        <a:scrgbClr r="0" g="0" b="0"/>
+      </a:effectRef>
+      <a:fontRef idx="minor"/>
+    </dgm:style>
+  </dgm:styleLbl>
+  <dgm:styleLbl name="asst0">
+    <dgm:scene3d>
+      <a:camera prst="orthographicFront"/>
+      <a:lightRig rig="threePt" dir="t"/>
+    </dgm:scene3d>
+    <dgm:sp3d/>
+    <dgm:txPr/>
+    <dgm:style>
+      <a:lnRef idx="2">
+        <a:scrgbClr r="0" g="0" b="0"/>
+      </a:lnRef>
+      <a:fillRef idx="1">
+        <a:scrgbClr r="0" g="0" b="0"/>
+      </a:fillRef>
+      <a:effectRef idx="0">
+        <a:scrgbClr r="0" g="0" b="0"/>
+      </a:effectRef>
+      <a:fontRef idx="minor">
+        <a:schemeClr val="lt1"/>
+      </a:fontRef>
+    </dgm:style>
+  </dgm:styleLbl>
+  <dgm:styleLbl name="asst1">
+    <dgm:scene3d>
+      <a:camera prst="orthographicFront"/>
+      <a:lightRig rig="threePt" dir="t"/>
+    </dgm:scene3d>
+    <dgm:sp3d/>
+    <dgm:txPr/>
+    <dgm:style>
+      <a:lnRef idx="2">
+        <a:scrgbClr r="0" g="0" b="0"/>
+      </a:lnRef>
+      <a:fillRef idx="1">
+        <a:scrgbClr r="0" g="0" b="0"/>
+      </a:fillRef>
+      <a:effectRef idx="0">
+        <a:scrgbClr r="0" g="0" b="0"/>
+      </a:effectRef>
+      <a:fontRef idx="minor">
+        <a:schemeClr val="lt1"/>
+      </a:fontRef>
+    </dgm:style>
+  </dgm:styleLbl>
+  <dgm:styleLbl name="asst2">
+    <dgm:scene3d>
+      <a:camera prst="orthographicFront"/>
+      <a:lightRig rig="threePt" dir="t"/>
+    </dgm:scene3d>
+    <dgm:sp3d/>
+    <dgm:txPr/>
+    <dgm:style>
+      <a:lnRef idx="2">
+        <a:scrgbClr r="0" g="0" b="0"/>
+      </a:lnRef>
+      <a:fillRef idx="1">
+        <a:scrgbClr r="0" g="0" b="0"/>
+      </a:fillRef>
+      <a:effectRef idx="0">
+        <a:scrgbClr r="0" g="0" b="0"/>
+      </a:effectRef>
+      <a:fontRef idx="minor">
+        <a:schemeClr val="lt1"/>
+      </a:fontRef>
+    </dgm:style>
+  </dgm:styleLbl>
+  <dgm:styleLbl name="asst3">
+    <dgm:scene3d>
+      <a:camera prst="orthographicFront"/>
+      <a:lightRig rig="threePt" dir="t"/>
+    </dgm:scene3d>
+    <dgm:sp3d/>
+    <dgm:txPr/>
+    <dgm:style>
+      <a:lnRef idx="2">
+        <a:scrgbClr r="0" g="0" b="0"/>
+      </a:lnRef>
+      <a:fillRef idx="1">
+        <a:scrgbClr r="0" g="0" b="0"/>
+      </a:fillRef>
+      <a:effectRef idx="0">
+        <a:scrgbClr r="0" g="0" b="0"/>
+      </a:effectRef>
+      <a:fontRef idx="minor">
+        <a:schemeClr val="lt1"/>
+      </a:fontRef>
+    </dgm:style>
+  </dgm:styleLbl>
+  <dgm:styleLbl name="asst4">
+    <dgm:scene3d>
+      <a:camera prst="orthographicFront"/>
+      <a:lightRig rig="threePt" dir="t"/>
+    </dgm:scene3d>
+    <dgm:sp3d/>
+    <dgm:txPr/>
+    <dgm:style>
+      <a:lnRef idx="2">
+        <a:scrgbClr r="0" g="0" b="0"/>
+      </a:lnRef>
+      <a:fillRef idx="1">
+        <a:scrgbClr r="0" g="0" b="0"/>
+      </a:fillRef>
+      <a:effectRef idx="0">
+        <a:scrgbClr r="0" g="0" b="0"/>
+      </a:effectRef>
+      <a:fontRef idx="minor">
+        <a:schemeClr val="lt1"/>
+      </a:fontRef>
+    </dgm:style>
+  </dgm:styleLbl>
+  <dgm:styleLbl name="parChTrans2D1">
+    <dgm:scene3d>
+      <a:camera prst="orthographicFront"/>
+      <a:lightRig rig="threePt" dir="t"/>
+    </dgm:scene3d>
+    <dgm:sp3d/>
+    <dgm:txPr/>
+    <dgm:style>
+      <a:lnRef idx="2">
+        <a:scrgbClr r="0" g="0" b="0"/>
+      </a:lnRef>
+      <a:fillRef idx="1">
+        <a:scrgbClr r="0" g="0" b="0"/>
+      </a:fillRef>
+      <a:effectRef idx="0">
+        <a:scrgbClr r="0" g="0" b="0"/>
+      </a:effectRef>
+      <a:fontRef idx="minor">
+        <a:schemeClr val="lt1"/>
+      </a:fontRef>
+    </dgm:style>
+  </dgm:styleLbl>
+  <dgm:styleLbl name="parChTrans2D2">
+    <dgm:scene3d>
+      <a:camera prst="orthographicFront"/>
+      <a:lightRig rig="threePt" dir="t"/>
+    </dgm:scene3d>
+    <dgm:sp3d/>
+    <dgm:txPr/>
+    <dgm:style>
+      <a:lnRef idx="2">
+        <a:scrgbClr r="0" g="0" b="0"/>
+      </a:lnRef>
+      <a:fillRef idx="1">
+        <a:scrgbClr r="0" g="0" b="0"/>
+      </a:fillRef>
+      <a:effectRef idx="0">
+        <a:scrgbClr r="0" g="0" b="0"/>
+      </a:effectRef>
+      <a:fontRef idx="minor">
+        <a:schemeClr val="lt1"/>
+      </a:fontRef>
+    </dgm:style>
+  </dgm:styleLbl>
+  <dgm:styleLbl name="parChTrans2D3">
+    <dgm:scene3d>
+      <a:camera prst="orthographicFront"/>
+      <a:lightRig rig="threePt" dir="t"/>
+    </dgm:scene3d>
+    <dgm:sp3d/>
+    <dgm:txPr/>
+    <dgm:style>
+      <a:lnRef idx="2">
+        <a:scrgbClr r="0" g="0" b="0"/>
+      </a:lnRef>
+      <a:fillRef idx="1">
+        <a:scrgbClr r="0" g="0" b="0"/>
+      </a:fillRef>
+      <a:effectRef idx="0">
+        <a:scrgbClr r="0" g="0" b="0"/>
+      </a:effectRef>
+      <a:fontRef idx="minor">
+        <a:schemeClr val="lt1"/>
+      </a:fontRef>
+    </dgm:style>
+  </dgm:styleLbl>
+  <dgm:styleLbl name="parChTrans2D4">
+    <dgm:scene3d>
+      <a:camera prst="orthographicFront"/>
+      <a:lightRig rig="threePt" dir="t"/>
+    </dgm:scene3d>
+    <dgm:sp3d/>
+    <dgm:txPr/>
+    <dgm:style>
+      <a:lnRef idx="2">
+        <a:scrgbClr r="0" g="0" b="0"/>
+      </a:lnRef>
+      <a:fillRef idx="1">
+        <a:scrgbClr r="0" g="0" b="0"/>
+      </a:fillRef>
+      <a:effectRef idx="0">
+        <a:scrgbClr r="0" g="0" b="0"/>
+      </a:effectRef>
+      <a:fontRef idx="minor">
+        <a:schemeClr val="lt1"/>
+      </a:fontRef>
+    </dgm:style>
+  </dgm:styleLbl>
+  <dgm:styleLbl name="parChTrans1D1">
+    <dgm:scene3d>
+      <a:camera prst="orthographicFront"/>
+      <a:lightRig rig="threePt" dir="t"/>
+    </dgm:scene3d>
+    <dgm:sp3d/>
+    <dgm:txPr/>
+    <dgm:style>
+      <a:lnRef idx="2">
+        <a:scrgbClr r="0" g="0" b="0"/>
+      </a:lnRef>
+      <a:fillRef idx="0">
+        <a:scrgbClr r="0" g="0" b="0"/>
+      </a:fillRef>
+      <a:effectRef idx="0">
+        <a:scrgbClr r="0" g="0" b="0"/>
+      </a:effectRef>
+      <a:fontRef idx="minor"/>
+    </dgm:style>
+  </dgm:styleLbl>
+  <dgm:styleLbl name="parChTrans1D2">
+    <dgm:scene3d>
+      <a:camera prst="orthographicFront"/>
+      <a:lightRig rig="threePt" dir="t"/>
+    </dgm:scene3d>
+    <dgm:sp3d/>
+    <dgm:txPr/>
+    <dgm:style>
+      <a:lnRef idx="2">
+        <a:scrgbClr r="0" g="0" b="0"/>
+      </a:lnRef>
+      <a:fillRef idx="0">
+        <a:scrgbClr r="0" g="0" b="0"/>
+      </a:fillRef>
+      <a:effectRef idx="0">
+        <a:scrgbClr r="0" g="0" b="0"/>
+      </a:effectRef>
+      <a:fontRef idx="minor"/>
+    </dgm:style>
+  </dgm:styleLbl>
+  <dgm:styleLbl name="parChTrans1D3">
+    <dgm:scene3d>
+      <a:camera prst="orthographicFront"/>
+      <a:lightRig rig="threePt" dir="t"/>
+    </dgm:scene3d>
+    <dgm:sp3d/>
+    <dgm:txPr/>
+    <dgm:style>
+      <a:lnRef idx="2">
+        <a:scrgbClr r="0" g="0" b="0"/>
+      </a:lnRef>
+      <a:fillRef idx="0">
+        <a:scrgbClr r="0" g="0" b="0"/>
+      </a:fillRef>
+      <a:effectRef idx="0">
+        <a:scrgbClr r="0" g="0" b="0"/>
+      </a:effectRef>
+      <a:fontRef idx="minor"/>
+    </dgm:style>
+  </dgm:styleLbl>
+  <dgm:styleLbl name="parChTrans1D4">
+    <dgm:scene3d>
+      <a:camera prst="orthographicFront"/>
+      <a:lightRig rig="threePt" dir="t"/>
+    </dgm:scene3d>
+    <dgm:sp3d/>
+    <dgm:txPr/>
+    <dgm:style>
+      <a:lnRef idx="2">
+        <a:scrgbClr r="0" g="0" b="0"/>
+      </a:lnRef>
+      <a:fillRef idx="0">
+        <a:scrgbClr r="0" g="0" b="0"/>
+      </a:fillRef>
+      <a:effectRef idx="0">
+        <a:scrgbClr r="0" g="0" b="0"/>
+      </a:effectRef>
+      <a:fontRef idx="minor"/>
+    </dgm:style>
+  </dgm:styleLbl>
+  <dgm:styleLbl name="fgAcc1">
+    <dgm:scene3d>
+      <a:camera prst="orthographicFront"/>
+      <a:lightRig rig="threePt" dir="t"/>
+    </dgm:scene3d>
+    <dgm:sp3d/>
+    <dgm:txPr/>
+    <dgm:style>
+      <a:lnRef idx="2">
+        <a:scrgbClr r="0" g="0" b="0"/>
+      </a:lnRef>
+      <a:fillRef idx="1">
+        <a:scrgbClr r="0" g="0" b="0"/>
+      </a:fillRef>
+      <a:effectRef idx="0">
+        <a:scrgbClr r="0" g="0" b="0"/>
+      </a:effectRef>
+      <a:fontRef idx="minor"/>
+    </dgm:style>
+  </dgm:styleLbl>
+  <dgm:styleLbl name="conFgAcc1">
+    <dgm:scene3d>
+      <a:camera prst="orthographicFront"/>
+      <a:lightRig rig="threePt" dir="t"/>
+    </dgm:scene3d>
+    <dgm:sp3d/>
+    <dgm:txPr/>
+    <dgm:style>
+      <a:lnRef idx="2">
+        <a:scrgbClr r="0" g="0" b="0"/>
+      </a:lnRef>
+      <a:fillRef idx="1">
+        <a:scrgbClr r="0" g="0" b="0"/>
+      </a:fillRef>
+      <a:effectRef idx="0">
+        <a:scrgbClr r="0" g="0" b="0"/>
+      </a:effectRef>
+      <a:fontRef idx="minor"/>
+    </dgm:style>
+  </dgm:styleLbl>
+  <dgm:styleLbl name="alignAcc1">
+    <dgm:scene3d>
+      <a:camera prst="orthographicFront"/>
+      <a:lightRig rig="threePt" dir="t"/>
+    </dgm:scene3d>
+    <dgm:sp3d/>
+    <dgm:txPr/>
+    <dgm:style>
+      <a:lnRef idx="2">
+        <a:scrgbClr r="0" g="0" b="0"/>
+      </a:lnRef>
+      <a:fillRef idx="1">
+        <a:scrgbClr r="0" g="0" b="0"/>
+      </a:fillRef>
+      <a:effectRef idx="0">
+        <a:scrgbClr r="0" g="0" b="0"/>
+      </a:effectRef>
+      <a:fontRef idx="minor"/>
+    </dgm:style>
+  </dgm:styleLbl>
+  <dgm:styleLbl name="trAlignAcc1">
+    <dgm:scene3d>
+      <a:camera prst="orthographicFront"/>
+      <a:lightRig rig="threePt" dir="t"/>
+    </dgm:scene3d>
+    <dgm:sp3d/>
+    <dgm:txPr/>
+    <dgm:style>
+      <a:lnRef idx="1">
+        <a:scrgbClr r="0" g="0" b="0"/>
+      </a:lnRef>
+      <a:fillRef idx="1">
+        <a:scrgbClr r="0" g="0" b="0"/>
+      </a:fillRef>
+      <a:effectRef idx="0">
+        <a:scrgbClr r="0" g="0" b="0"/>
+      </a:effectRef>
+      <a:fontRef idx="minor"/>
+    </dgm:style>
+  </dgm:styleLbl>
+  <dgm:styleLbl name="bgAcc1">
+    <dgm:scene3d>
+      <a:camera prst="orthographicFront"/>
+      <a:lightRig rig="threePt" dir="t"/>
+    </dgm:scene3d>
+    <dgm:sp3d/>
+    <dgm:txPr/>
+    <dgm:style>
+      <a:lnRef idx="2">
+        <a:scrgbClr r="0" g="0" b="0"/>
+      </a:lnRef>
+      <a:fillRef idx="1">
+        <a:scrgbClr r="0" g="0" b="0"/>
+      </a:fillRef>
+      <a:effectRef idx="0">
+        <a:scrgbClr r="0" g="0" b="0"/>
+      </a:effectRef>
+      <a:fontRef idx="minor"/>
+    </dgm:style>
+  </dgm:styleLbl>
+  <dgm:styleLbl name="solidFgAcc1">
+    <dgm:scene3d>
+      <a:camera prst="orthographicFront"/>
+      <a:lightRig rig="threePt" dir="t"/>
+    </dgm:scene3d>
+    <dgm:sp3d/>
+    <dgm:txPr/>
+    <dgm:style>
+      <a:lnRef idx="2">
+        <a:scrgbClr r="0" g="0" b="0"/>
+      </a:lnRef>
+      <a:fillRef idx="1">
+        <a:scrgbClr r="0" g="0" b="0"/>
+      </a:fillRef>
+      <a:effectRef idx="0">
+        <a:scrgbClr r="0" g="0" b="0"/>
+      </a:effectRef>
+      <a:fontRef idx="minor"/>
+    </dgm:style>
+  </dgm:styleLbl>
+  <dgm:styleLbl name="solidAlignAcc1">
+    <dgm:scene3d>
+      <a:camera prst="orthographicFront"/>
+      <a:lightRig rig="threePt" dir="t"/>
+    </dgm:scene3d>
+    <dgm:sp3d/>
+    <dgm:txPr/>
+    <dgm:style>
+      <a:lnRef idx="2">
+        <a:scrgbClr r="0" g="0" b="0"/>
+      </a:lnRef>
+      <a:fillRef idx="1">
+        <a:scrgbClr r="0" g="0" b="0"/>
+      </a:fillRef>
+      <a:effectRef idx="0">
+        <a:scrgbClr r="0" g="0" b="0"/>
+      </a:effectRef>
+      <a:fontRef idx="minor"/>
+    </dgm:style>
+  </dgm:styleLbl>
+  <dgm:styleLbl name="solidBgAcc1">
+    <dgm:scene3d>
+      <a:camera prst="orthographicFront"/>
+      <a:lightRig rig="threePt" dir="t"/>
+    </dgm:scene3d>
+    <dgm:sp3d/>
+    <dgm:txPr/>
+    <dgm:style>
+      <a:lnRef idx="2">
+        <a:scrgbClr r="0" g="0" b="0"/>
+      </a:lnRef>
+      <a:fillRef idx="1">
+        <a:scrgbClr r="0" g="0" b="0"/>
+      </a:fillRef>
+      <a:effectRef idx="0">
+        <a:scrgbClr r="0" g="0" b="0"/>
+      </a:effectRef>
+      <a:fontRef idx="minor"/>
+    </dgm:style>
+  </dgm:styleLbl>
+  <dgm:styleLbl name="fgAccFollowNode1">
+    <dgm:scene3d>
+      <a:camera prst="orthographicFront"/>
+      <a:lightRig rig="threePt" dir="t"/>
+    </dgm:scene3d>
+    <dgm:sp3d/>
+    <dgm:txPr/>
+    <dgm:style>
+      <a:lnRef idx="2">
+        <a:scrgbClr r="0" g="0" b="0"/>
+      </a:lnRef>
+      <a:fillRef idx="1">
+        <a:scrgbClr r="0" g="0" b="0"/>
+      </a:fillRef>
+      <a:effectRef idx="0">
+        <a:scrgbClr r="0" g="0" b="0"/>
+      </a:effectRef>
+      <a:fontRef idx="minor"/>
+    </dgm:style>
+  </dgm:styleLbl>
+  <dgm:styleLbl name="alignAccFollowNode1">
+    <dgm:scene3d>
+      <a:camera prst="orthographicFront"/>
+      <a:lightRig rig="threePt" dir="t"/>
+    </dgm:scene3d>
+    <dgm:sp3d/>
+    <dgm:txPr/>
+    <dgm:style>
+      <a:lnRef idx="2">
+        <a:scrgbClr r="0" g="0" b="0"/>
+      </a:lnRef>
+      <a:fillRef idx="1">
+        <a:scrgbClr r="0" g="0" b="0"/>
+      </a:fillRef>
+      <a:effectRef idx="0">
+        <a:scrgbClr r="0" g="0" b="0"/>
+      </a:effectRef>
+      <a:fontRef idx="minor"/>
+    </dgm:style>
+  </dgm:styleLbl>
+  <dgm:styleLbl name="bgAccFollowNode1">
+    <dgm:scene3d>
+      <a:camera prst="orthographicFront"/>
+      <a:lightRig rig="threePt" dir="t"/>
+    </dgm:scene3d>
+    <dgm:sp3d/>
+    <dgm:txPr/>
+    <dgm:style>
+      <a:lnRef idx="2">
+        <a:scrgbClr r="0" g="0" b="0"/>
+      </a:lnRef>
+      <a:fillRef idx="1">
+        <a:scrgbClr r="0" g="0" b="0"/>
+      </a:fillRef>
+      <a:effectRef idx="0">
+        <a:scrgbClr r="0" g="0" b="0"/>
+      </a:effectRef>
+      <a:fontRef idx="minor"/>
+    </dgm:style>
+  </dgm:styleLbl>
+  <dgm:styleLbl name="fgAcc0">
+    <dgm:scene3d>
+      <a:camera prst="orthographicFront"/>
+      <a:lightRig rig="threePt" dir="t"/>
+    </dgm:scene3d>
+    <dgm:sp3d/>
+    <dgm:txPr/>
+    <dgm:style>
+      <a:lnRef idx="2">
+        <a:scrgbClr r="0" g="0" b="0"/>
+      </a:lnRef>
+      <a:fillRef idx="1">
+        <a:scrgbClr r="0" g="0" b="0"/>
+      </a:fillRef>
+      <a:effectRef idx="0">
+        <a:scrgbClr r="0" g="0" b="0"/>
+      </a:effectRef>
+      <a:fontRef idx="minor"/>
+    </dgm:style>
+  </dgm:styleLbl>
+  <dgm:styleLbl name="fgAcc2">
+    <dgm:scene3d>
+      <a:camera prst="orthographicFront"/>
+      <a:lightRig rig="threePt" dir="t"/>
+    </dgm:scene3d>
+    <dgm:sp3d/>
+    <dgm:txPr/>
+    <dgm:style>
+      <a:lnRef idx="2">
+        <a:scrgbClr r="0" g="0" b="0"/>
+      </a:lnRef>
+      <a:fillRef idx="1">
+        <a:scrgbClr r="0" g="0" b="0"/>
+      </a:fillRef>
+      <a:effectRef idx="0">
+        <a:scrgbClr r="0" g="0" b="0"/>
+      </a:effectRef>
+      <a:fontRef idx="minor"/>
+    </dgm:style>
+  </dgm:styleLbl>
+  <dgm:styleLbl name="fgAcc3">
+    <dgm:scene3d>
+      <a:camera prst="orthographicFront"/>
+      <a:lightRig rig="threePt" dir="t"/>
+    </dgm:scene3d>
+    <dgm:sp3d/>
+    <dgm:txPr/>
+    <dgm:style>
+      <a:lnRef idx="2">
+        <a:scrgbClr r="0" g="0" b="0"/>
+      </a:lnRef>
+      <a:fillRef idx="1">
+        <a:scrgbClr r="0" g="0" b="0"/>
+      </a:fillRef>
+      <a:effectRef idx="0">
+        <a:scrgbClr r="0" g="0" b="0"/>
+      </a:effectRef>
+      <a:fontRef idx="minor"/>
+    </dgm:style>
+  </dgm:styleLbl>
+  <dgm:styleLbl name="fgAcc4">
+    <dgm:scene3d>
+      <a:camera prst="orthographicFront"/>
+      <a:lightRig rig="threePt" dir="t"/>
+    </dgm:scene3d>
+    <dgm:sp3d/>
+    <dgm:txPr/>
+    <dgm:style>
+      <a:lnRef idx="2">
+        <a:scrgbClr r="0" g="0" b="0"/>
+      </a:lnRef>
+      <a:fillRef idx="1">
+        <a:scrgbClr r="0" g="0" b="0"/>
+      </a:fillRef>
+      <a:effectRef idx="0">
+        <a:scrgbClr r="0" g="0" b="0"/>
+      </a:effectRef>
+      <a:fontRef idx="minor"/>
+    </dgm:style>
+  </dgm:styleLbl>
+  <dgm:styleLbl name="bgShp">
+    <dgm:scene3d>
+      <a:camera prst="orthographicFront"/>
+      <a:lightRig rig="threePt" dir="t"/>
+    </dgm:scene3d>
+    <dgm:sp3d/>
+    <dgm:txPr/>
+    <dgm:style>
+      <a:lnRef idx="0">
+        <a:scrgbClr r="0" g="0" b="0"/>
+      </a:lnRef>
+      <a:fillRef idx="1">
+        <a:scrgbClr r="0" g="0" b="0"/>
+      </a:fillRef>
+      <a:effectRef idx="0">
+        <a:scrgbClr r="0" g="0" b="0"/>
+      </a:effectRef>
+      <a:fontRef idx="minor"/>
+    </dgm:style>
+  </dgm:styleLbl>
+  <dgm:styleLbl name="dkBgShp">
+    <dgm:scene3d>
+      <a:camera prst="orthographicFront"/>
+      <a:lightRig rig="threePt" dir="t"/>
+    </dgm:scene3d>
+    <dgm:sp3d/>
+    <dgm:txPr/>
+    <dgm:style>
+      <a:lnRef idx="0">
+        <a:scrgbClr r="0" g="0" b="0"/>
+      </a:lnRef>
+      <a:fillRef idx="1">
+        <a:scrgbClr r="0" g="0" b="0"/>
+      </a:fillRef>
+      <a:effectRef idx="0">
+        <a:scrgbClr r="0" g="0" b="0"/>
+      </a:effectRef>
+      <a:fontRef idx="minor"/>
+    </dgm:style>
+  </dgm:styleLbl>
+  <dgm:styleLbl name="trBgShp">
+    <dgm:scene3d>
+      <a:camera prst="orthographicFront"/>
+      <a:lightRig rig="threePt" dir="t"/>
+    </dgm:scene3d>
+    <dgm:sp3d/>
+    <dgm:txPr/>
+    <dgm:style>
+      <a:lnRef idx="0">
+        <a:scrgbClr r="0" g="0" b="0"/>
+      </a:lnRef>
+      <a:fillRef idx="1">
+        <a:scrgbClr r="0" g="0" b="0"/>
+      </a:fillRef>
+      <a:effectRef idx="0">
+        <a:scrgbClr r="0" g="0" b="0"/>
+      </a:effectRef>
+      <a:fontRef idx="minor"/>
+    </dgm:style>
+  </dgm:styleLbl>
+  <dgm:styleLbl name="fgShp">
+    <dgm:scene3d>
+      <a:camera prst="orthographicFront"/>
+      <a:lightRig rig="threePt" dir="t"/>
+    </dgm:scene3d>
+    <dgm:sp3d/>
+    <dgm:txPr/>
+    <dgm:style>
+      <a:lnRef idx="2">
+        <a:scrgbClr r="0" g="0" b="0"/>
+      </a:lnRef>
+      <a:fillRef idx="1">
+        <a:scrgbClr r="0" g="0" b="0"/>
+      </a:fillRef>
+      <a:effectRef idx="0">
+        <a:scrgbClr r="0" g="0" b="0"/>
+      </a:effectRef>
+      <a:fontRef idx="minor"/>
+    </dgm:style>
+  </dgm:styleLbl>
+  <dgm:styleLbl name="revTx">
+    <dgm:scene3d>
+      <a:camera prst="orthographicFront"/>
+      <a:lightRig rig="threePt" dir="t"/>
+    </dgm:scene3d>
+    <dgm:sp3d/>
+    <dgm:txPr/>
+    <dgm:style>
+      <a:lnRef idx="0">
+        <a:scrgbClr r="0" g="0" b="0"/>
+      </a:lnRef>
+      <a:fillRef idx="0">
+        <a:scrgbClr r="0" g="0" b="0"/>
+      </a:fillRef>
+      <a:effectRef idx="0">
+        <a:scrgbClr r="0" g="0" b="0"/>
+      </a:effectRef>
+      <a:fontRef idx="minor"/>
+    </dgm:style>
+  </dgm:styleLbl>
+</dgm:styleDef>
+</file>
+
 <file path=ppt/notesMasters/notesMaster1.xml><?xml version="1.0" encoding="utf-8"?>
 <p:notesMaster xmlns:a="http://schemas.openxmlformats.org/drawingml/2006/main" xmlns:r="http://schemas.openxmlformats.org/officeDocument/2006/relationships" xmlns:p="http://schemas.openxmlformats.org/presentationml/2006/main">
   <p:cSld>
@@ -22380,7 +25205,7 @@
           <a:p>
             <a:fld id="{324A9B44-4828-EE48-BF9C-CBD1FA799CB2}" type="datetimeFigureOut">
               <a:rPr lang="es-ES_tradnl" smtClean="0"/>
-              <a:t>12/8/25</a:t>
+              <a:t>11/8/26</a:t>
             </a:fld>
             <a:endParaRPr lang="es-ES_tradnl"/>
           </a:p>
@@ -22708,6 +25533,13 @@
             <a:schemeClr val="lt1"/>
           </a:fontRef>
         </p:style>
+        <p:txBody>
+          <a:bodyPr/>
+          <a:lstStyle/>
+          <a:p>
+            <a:endParaRPr lang="es-MX"/>
+          </a:p>
+        </p:txBody>
       </p:sp>
       <p:sp>
         <p:nvSpPr>
@@ -22892,7 +25724,7 @@
           <a:p>
             <a:fld id="{49D12D98-04F8-C542-A6E9-122D9DBEC8FD}" type="datetime1">
               <a:rPr lang="es-MX" smtClean="0"/>
-              <a:t>12/08/25</a:t>
+              <a:t>11/08/26</a:t>
             </a:fld>
             <a:endParaRPr lang="en-US"/>
           </a:p>
@@ -23080,7 +25912,7 @@
           <a:p>
             <a:fld id="{0A038124-6A46-A449-9989-05131BFDA31F}" type="datetime1">
               <a:rPr lang="es-MX" smtClean="0"/>
-              <a:t>12/08/25</a:t>
+              <a:t>11/08/26</a:t>
             </a:fld>
             <a:endParaRPr lang="en-US"/>
           </a:p>
@@ -23322,7 +26154,7 @@
           <a:p>
             <a:fld id="{563D23C5-55F1-8B47-AB49-A5DDC5F64A62}" type="datetime1">
               <a:rPr lang="es-MX" smtClean="0"/>
-              <a:t>12/08/25</a:t>
+              <a:t>11/08/26</a:t>
             </a:fld>
             <a:endParaRPr lang="en-US"/>
           </a:p>
@@ -23510,7 +26342,7 @@
           <a:p>
             <a:fld id="{42655641-0FAA-A646-995E-E89A531CC860}" type="datetime1">
               <a:rPr lang="es-MX" smtClean="0"/>
-              <a:t>12/08/25</a:t>
+              <a:t>11/08/26</a:t>
             </a:fld>
             <a:endParaRPr lang="en-US"/>
           </a:p>
@@ -23883,7 +26715,7 @@
           <a:p>
             <a:fld id="{E38FF827-A2F6-7F40-A0C4-D5176BE807EC}" type="datetime1">
               <a:rPr lang="es-MX" smtClean="0"/>
-              <a:t>12/08/25</a:t>
+              <a:t>11/08/26</a:t>
             </a:fld>
             <a:endParaRPr lang="en-US"/>
           </a:p>
@@ -24138,7 +26970,7 @@
           <a:p>
             <a:fld id="{6DCE5B51-294A-6040-BD86-0F3F2FE93ED7}" type="datetime1">
               <a:rPr lang="es-MX" smtClean="0"/>
-              <a:t>12/08/25</a:t>
+              <a:t>11/08/26</a:t>
             </a:fld>
             <a:endParaRPr lang="en-US"/>
           </a:p>
@@ -24535,7 +27367,7 @@
           <a:p>
             <a:fld id="{E6C14B89-0E7F-324D-9ED0-93C9CC0B2BEE}" type="datetime1">
               <a:rPr lang="es-MX" smtClean="0"/>
-              <a:t>12/08/25</a:t>
+              <a:t>11/08/26</a:t>
             </a:fld>
             <a:endParaRPr lang="en-US"/>
           </a:p>
@@ -24671,7 +27503,7 @@
           <a:p>
             <a:fld id="{12A3A656-C5B3-8C4F-901C-AC70F2A1D850}" type="datetime1">
               <a:rPr lang="es-MX" smtClean="0"/>
-              <a:t>12/08/25</a:t>
+              <a:t>11/08/26</a:t>
             </a:fld>
             <a:endParaRPr lang="en-US"/>
           </a:p>
@@ -24828,7 +27660,7 @@
           <a:p>
             <a:fld id="{DE88DC43-BF74-6A46-874A-FC88FBCA6573}" type="datetime1">
               <a:rPr lang="es-MX" smtClean="0"/>
-              <a:t>12/08/25</a:t>
+              <a:t>11/08/26</a:t>
             </a:fld>
             <a:endParaRPr lang="en-US"/>
           </a:p>
@@ -25157,7 +27989,7 @@
           <a:p>
             <a:fld id="{CA67A850-70B0-664E-9DAC-92F8E98DA82D}" type="datetime1">
               <a:rPr lang="es-MX" smtClean="0"/>
-              <a:t>12/08/25</a:t>
+              <a:t>11/08/26</a:t>
             </a:fld>
             <a:endParaRPr lang="en-US"/>
           </a:p>
@@ -25506,7 +28338,7 @@
           <a:p>
             <a:fld id="{F5DBB4EA-EB6F-944D-9298-0BE7B40FCEBE}" type="datetime1">
               <a:rPr lang="es-MX" smtClean="0"/>
-              <a:t>12/08/25</a:t>
+              <a:t>11/08/26</a:t>
             </a:fld>
             <a:endParaRPr lang="en-US"/>
           </a:p>
@@ -25638,6 +28470,13 @@
             <a:schemeClr val="lt1"/>
           </a:fontRef>
         </p:style>
+        <p:txBody>
+          <a:bodyPr/>
+          <a:lstStyle/>
+          <a:p>
+            <a:endParaRPr lang="es-MX"/>
+          </a:p>
+        </p:txBody>
       </p:sp>
       <p:sp>
         <p:nvSpPr>
@@ -25767,7 +28606,7 @@
           <a:p>
             <a:fld id="{0ECAF8A3-8507-EB4A-9023-5E0BA237C12F}" type="datetime1">
               <a:rPr lang="es-MX" smtClean="0"/>
-              <a:t>12/08/25</a:t>
+              <a:t>11/08/26</a:t>
             </a:fld>
             <a:endParaRPr lang="en-US"/>
           </a:p>
@@ -26484,7 +29323,7 @@
                   <a:srgbClr val="FFFFFF"/>
                 </a:solidFill>
               </a:rPr>
-              <a:t>Semestre 2025-2</a:t>
+              <a:t>Semestre 2026-2</a:t>
             </a:r>
           </a:p>
           <a:p>
@@ -28811,6 +31650,308 @@
     </p:bg>
     <p:spTree>
       <p:nvGrpSpPr>
+        <p:cNvPr id="1" name="">
+          <a:extLst>
+            <a:ext uri="{FF2B5EF4-FFF2-40B4-BE49-F238E27FC236}">
+              <a16:creationId xmlns:a16="http://schemas.microsoft.com/office/drawing/2014/main" id="{A8E514A0-5E12-3466-1B91-4D4A17B9997C}"/>
+            </a:ext>
+          </a:extLst>
+        </p:cNvPr>
+        <p:cNvGrpSpPr/>
+        <p:nvPr/>
+      </p:nvGrpSpPr>
+      <p:grpSpPr>
+        <a:xfrm>
+          <a:off x="0" y="0"/>
+          <a:ext cx="0" cy="0"/>
+          <a:chOff x="0" y="0"/>
+          <a:chExt cx="0" cy="0"/>
+        </a:xfrm>
+      </p:grpSpPr>
+      <p:sp useBgFill="1">
+        <p:nvSpPr>
+          <p:cNvPr id="24" name="Rectangle 17">
+            <a:extLst>
+              <a:ext uri="{FF2B5EF4-FFF2-40B4-BE49-F238E27FC236}">
+                <a16:creationId xmlns:a16="http://schemas.microsoft.com/office/drawing/2014/main" id="{EE1530B0-6F96-46C0-8B3E-3215CB756BE4}"/>
+              </a:ext>
+              <a:ext uri="{C183D7F6-B498-43B3-948B-1728B52AA6E4}">
+                <adec:decorative xmlns:adec="http://schemas.microsoft.com/office/drawing/2017/decorative" val="1"/>
+              </a:ext>
+            </a:extLst>
+          </p:cNvPr>
+          <p:cNvSpPr>
+            <a:spLocks noGrp="1" noRot="1" noChangeAspect="1" noMove="1" noResize="1" noEditPoints="1" noAdjustHandles="1" noChangeArrowheads="1" noChangeShapeType="1" noTextEdit="1"/>
+          </p:cNvSpPr>
+          <p:nvPr>
+            <p:extLst>
+              <p:ext uri="{386F3935-93C4-4BCD-93E2-E3B085C9AB24}">
+                <p16:designElem xmlns:p16="http://schemas.microsoft.com/office/powerpoint/2015/main" val="1"/>
+              </p:ext>
+            </p:extLst>
+          </p:nvPr>
+        </p:nvSpPr>
+        <p:spPr>
+          <a:xfrm>
+            <a:off x="5685" y="0"/>
+            <a:ext cx="12186315" cy="6858000"/>
+          </a:xfrm>
+          <a:prstGeom prst="rect">
+            <a:avLst/>
+          </a:prstGeom>
+          <a:ln>
+            <a:noFill/>
+          </a:ln>
+        </p:spPr>
+        <p:style>
+          <a:lnRef idx="2">
+            <a:schemeClr val="accent6">
+              <a:shade val="50000"/>
+            </a:schemeClr>
+          </a:lnRef>
+          <a:fillRef idx="1001">
+            <a:schemeClr val="lt1"/>
+          </a:fillRef>
+          <a:effectRef idx="0">
+            <a:schemeClr val="accent6"/>
+          </a:effectRef>
+          <a:fontRef idx="minor">
+            <a:schemeClr val="lt1"/>
+          </a:fontRef>
+        </p:style>
+        <p:txBody>
+          <a:bodyPr rtlCol="0" anchor="ctr"/>
+          <a:lstStyle/>
+          <a:p>
+            <a:pPr algn="ctr"/>
+            <a:endParaRPr lang="en-US"/>
+          </a:p>
+        </p:txBody>
+      </p:sp>
+      <p:sp>
+        <p:nvSpPr>
+          <p:cNvPr id="25" name="Rectangle 19">
+            <a:extLst>
+              <a:ext uri="{FF2B5EF4-FFF2-40B4-BE49-F238E27FC236}">
+                <a16:creationId xmlns:a16="http://schemas.microsoft.com/office/drawing/2014/main" id="{754910CF-1B56-45D3-960A-E89F7B3B9131}"/>
+              </a:ext>
+              <a:ext uri="{C183D7F6-B498-43B3-948B-1728B52AA6E4}">
+                <adec:decorative xmlns:adec="http://schemas.microsoft.com/office/drawing/2017/decorative" val="1"/>
+              </a:ext>
+            </a:extLst>
+          </p:cNvPr>
+          <p:cNvSpPr>
+            <a:spLocks noGrp="1" noRot="1" noChangeAspect="1" noMove="1" noResize="1" noEditPoints="1" noAdjustHandles="1" noChangeArrowheads="1" noChangeShapeType="1" noTextEdit="1"/>
+          </p:cNvSpPr>
+          <p:nvPr>
+            <p:extLst>
+              <p:ext uri="{386F3935-93C4-4BCD-93E2-E3B085C9AB24}">
+                <p16:designElem xmlns:p16="http://schemas.microsoft.com/office/powerpoint/2015/main" val="1"/>
+              </p:ext>
+            </p:extLst>
+          </p:nvPr>
+        </p:nvSpPr>
+        <p:spPr>
+          <a:xfrm>
+            <a:off x="16" y="0"/>
+            <a:ext cx="4050791" cy="6858000"/>
+          </a:xfrm>
+          <a:prstGeom prst="rect">
+            <a:avLst/>
+          </a:prstGeom>
+          <a:solidFill>
+            <a:schemeClr val="tx1">
+              <a:lumMod val="85000"/>
+              <a:lumOff val="15000"/>
+            </a:schemeClr>
+          </a:solidFill>
+          <a:ln>
+            <a:noFill/>
+          </a:ln>
+        </p:spPr>
+        <p:style>
+          <a:lnRef idx="2">
+            <a:schemeClr val="accent1">
+              <a:shade val="50000"/>
+            </a:schemeClr>
+          </a:lnRef>
+          <a:fillRef idx="1">
+            <a:schemeClr val="accent1"/>
+          </a:fillRef>
+          <a:effectRef idx="0">
+            <a:schemeClr val="accent1"/>
+          </a:effectRef>
+          <a:fontRef idx="minor">
+            <a:schemeClr val="lt1"/>
+          </a:fontRef>
+        </p:style>
+        <p:txBody>
+          <a:bodyPr/>
+          <a:lstStyle/>
+          <a:p>
+            <a:endParaRPr lang="es-MX"/>
+          </a:p>
+        </p:txBody>
+      </p:sp>
+      <p:sp>
+        <p:nvSpPr>
+          <p:cNvPr id="2" name="Título 1">
+            <a:extLst>
+              <a:ext uri="{FF2B5EF4-FFF2-40B4-BE49-F238E27FC236}">
+                <a16:creationId xmlns:a16="http://schemas.microsoft.com/office/drawing/2014/main" id="{273F1406-581D-03F7-7DF9-9C6B640F3D08}"/>
+              </a:ext>
+            </a:extLst>
+          </p:cNvPr>
+          <p:cNvSpPr>
+            <a:spLocks noGrp="1"/>
+          </p:cNvSpPr>
+          <p:nvPr>
+            <p:ph type="title"/>
+          </p:nvPr>
+        </p:nvSpPr>
+        <p:spPr>
+          <a:xfrm>
+            <a:off x="492370" y="516835"/>
+            <a:ext cx="3084844" cy="5772840"/>
+          </a:xfrm>
+        </p:spPr>
+        <p:txBody>
+          <a:bodyPr vert="horz" lIns="91440" tIns="45720" rIns="91440" bIns="45720" rtlCol="0" anchor="ctr">
+            <a:normAutofit/>
+          </a:bodyPr>
+          <a:lstStyle/>
+          <a:p>
+            <a:r>
+              <a:rPr lang="en-US" sz="3600">
+                <a:solidFill>
+                  <a:schemeClr val="bg1"/>
+                </a:solidFill>
+              </a:rPr>
+              <a:t>¡Pero el mundo va cambiando!</a:t>
+            </a:r>
+          </a:p>
+        </p:txBody>
+      </p:sp>
+      <p:sp>
+        <p:nvSpPr>
+          <p:cNvPr id="3" name="Marcador de número de diapositiva 2">
+            <a:extLst>
+              <a:ext uri="{FF2B5EF4-FFF2-40B4-BE49-F238E27FC236}">
+                <a16:creationId xmlns:a16="http://schemas.microsoft.com/office/drawing/2014/main" id="{D48B6EFC-093E-835A-4DA3-0344AC63FAB7}"/>
+              </a:ext>
+            </a:extLst>
+          </p:cNvPr>
+          <p:cNvSpPr>
+            <a:spLocks noGrp="1"/>
+          </p:cNvSpPr>
+          <p:nvPr>
+            <p:ph type="sldNum" sz="quarter" idx="12"/>
+          </p:nvPr>
+        </p:nvSpPr>
+        <p:spPr>
+          <a:xfrm>
+            <a:off x="10123055" y="6459785"/>
+            <a:ext cx="1089428" cy="365125"/>
+          </a:xfrm>
+        </p:spPr>
+        <p:txBody>
+          <a:bodyPr vert="horz" lIns="91440" tIns="45720" rIns="91440" bIns="45720" rtlCol="0" anchor="ctr">
+            <a:normAutofit/>
+          </a:bodyPr>
+          <a:lstStyle/>
+          <a:p>
+            <a:pPr>
+              <a:spcAft>
+                <a:spcPts val="600"/>
+              </a:spcAft>
+            </a:pPr>
+            <a:fld id="{3A98EE3D-8CD1-4C3F-BD1C-C98C9596463C}" type="slidenum">
+              <a:rPr lang="en-US" sz="1050">
+                <a:solidFill>
+                  <a:schemeClr val="tx2"/>
+                </a:solidFill>
+              </a:rPr>
+              <a:pPr>
+                <a:spcAft>
+                  <a:spcPts val="600"/>
+                </a:spcAft>
+              </a:pPr>
+              <a:t>17</a:t>
+            </a:fld>
+            <a:endParaRPr lang="en-US" sz="1050">
+              <a:solidFill>
+                <a:schemeClr val="tx2"/>
+              </a:solidFill>
+            </a:endParaRPr>
+          </a:p>
+        </p:txBody>
+      </p:sp>
+      <p:graphicFrame>
+        <p:nvGraphicFramePr>
+          <p:cNvPr id="26" name="CuadroTexto 3">
+            <a:extLst>
+              <a:ext uri="{FF2B5EF4-FFF2-40B4-BE49-F238E27FC236}">
+                <a16:creationId xmlns:a16="http://schemas.microsoft.com/office/drawing/2014/main" id="{5610A1D1-0339-8AFA-586B-839C8A630861}"/>
+              </a:ext>
+            </a:extLst>
+          </p:cNvPr>
+          <p:cNvGraphicFramePr/>
+          <p:nvPr>
+            <p:extLst>
+              <p:ext uri="{D42A27DB-BD31-4B8C-83A1-F6EECF244321}">
+                <p14:modId xmlns:p14="http://schemas.microsoft.com/office/powerpoint/2010/main" val="989241241"/>
+              </p:ext>
+            </p:extLst>
+          </p:nvPr>
+        </p:nvGraphicFramePr>
+        <p:xfrm>
+          <a:off x="4741863" y="639763"/>
+          <a:ext cx="6797675" cy="5649912"/>
+        </p:xfrm>
+        <a:graphic>
+          <a:graphicData uri="http://schemas.openxmlformats.org/drawingml/2006/diagram">
+            <dgm:relIds xmlns:dgm="http://schemas.openxmlformats.org/drawingml/2006/diagram" xmlns:r="http://schemas.openxmlformats.org/officeDocument/2006/relationships" r:dm="rId2" r:lo="rId3" r:qs="rId4" r:cs="rId5"/>
+          </a:graphicData>
+        </a:graphic>
+      </p:graphicFrame>
+    </p:spTree>
+    <p:extLst>
+      <p:ext uri="{BB962C8B-B14F-4D97-AF65-F5344CB8AC3E}">
+        <p14:creationId xmlns:p14="http://schemas.microsoft.com/office/powerpoint/2010/main" val="3164899605"/>
+      </p:ext>
+    </p:extLst>
+  </p:cSld>
+  <p:clrMapOvr>
+    <a:masterClrMapping/>
+  </p:clrMapOvr>
+  <mc:AlternateContent xmlns:mc="http://schemas.openxmlformats.org/markup-compatibility/2006">
+    <mc:Choice xmlns:p14="http://schemas.microsoft.com/office/powerpoint/2010/main" Requires="p14">
+      <p:transition spd="med" p14:dur="700">
+        <p:fade/>
+      </p:transition>
+    </mc:Choice>
+    <mc:Fallback>
+      <p:transition spd="med">
+        <p:fade/>
+      </p:transition>
+    </mc:Fallback>
+  </mc:AlternateContent>
+</p:sld>
+</file>
+
+<file path=ppt/slides/slide18.xml><?xml version="1.0" encoding="utf-8"?>
+<p:sld xmlns:a="http://schemas.openxmlformats.org/drawingml/2006/main" xmlns:r="http://schemas.openxmlformats.org/officeDocument/2006/relationships" xmlns:p="http://schemas.openxmlformats.org/presentationml/2006/main">
+  <p:cSld>
+    <p:bg>
+      <p:bgPr>
+        <a:solidFill>
+          <a:schemeClr val="bg1"/>
+        </a:solidFill>
+        <a:effectLst/>
+      </p:bgPr>
+    </p:bg>
+    <p:spTree>
+      <p:nvGrpSpPr>
         <p:cNvPr id="1" name=""/>
         <p:cNvGrpSpPr/>
         <p:nvPr/>
@@ -29076,7 +32217,7 @@
                   <a:spcPts val="600"/>
                 </a:spcAft>
               </a:pPr>
-              <a:t>17</a:t>
+              <a:t>18</a:t>
             </a:fld>
             <a:endParaRPr lang="en-US"/>
           </a:p>
@@ -29098,7 +32239,7 @@
             <p:ph idx="1"/>
             <p:extLst>
               <p:ext uri="{D42A27DB-BD31-4B8C-83A1-F6EECF244321}">
-                <p14:modId xmlns:p14="http://schemas.microsoft.com/office/powerpoint/2010/main" val="1981615955"/>
+                <p14:modId xmlns:p14="http://schemas.microsoft.com/office/powerpoint/2010/main" val="2638987889"/>
               </p:ext>
             </p:extLst>
           </p:nvPr>
@@ -29777,7 +32918,7 @@
             </a:r>
             <a:r>
               <a:rPr lang="es-ES_tradnl" sz="2000" dirty="0"/>
-              <a:t> para lectura de documentos y escritura de blogs</a:t>
+              <a:t> para escritura de blogs</a:t>
             </a:r>
           </a:p>
         </p:txBody>
